--- a/lessons/4-1/slides.pptx
+++ b/lessons/4-1/slides.pptx
@@ -10905,7 +10905,7 @@
       </p:sp>
       <p:sp>
         <p:nvSpPr>
-          <p:cNvPr id="20" name="Shape 18"/>
+          <p:cNvPr id="20" name="Text 18"/>
           <p:cNvSpPr/>
           <p:nvPr/>
         </p:nvSpPr>
@@ -10926,33 +10926,7 @@
             <a:solidFill>
               <a:srgbClr val="D6DBDF"/>
             </a:solidFill>
-            <a:prstDash val="solid"/>
           </a:ln>
-          <a:effectLst>
-            <a:outerShdw sx="100000" sy="100000" kx="0" ky="0" algn="bl" rotWithShape="0" blurRad="50800" dist="12700" dir="5400000">
-              <a:srgbClr val="1C2E42">
-                <a:alpha val="10000"/>
-              </a:srgbClr>
-            </a:outerShdw>
-          </a:effectLst>
-        </p:spPr>
-      </p:sp>
-      <p:sp>
-        <p:nvSpPr>
-          <p:cNvPr id="21" name="Text 19"/>
-          <p:cNvSpPr/>
-          <p:nvPr/>
-        </p:nvSpPr>
-        <p:spPr>
-          <a:xfrm>
-            <a:off x="685800" y="1481328"/>
-            <a:ext cx="1447800" cy="384048"/>
-          </a:xfrm>
-          <a:prstGeom prst="rect">
-            <a:avLst/>
-          </a:prstGeom>
-          <a:noFill/>
-          <a:ln/>
         </p:spPr>
         <p:txBody>
           <a:bodyPr wrap="square" rtlCol="0" anchor="ctr"/>
@@ -10962,7 +10936,7 @@
               <a:buNone/>
             </a:pPr>
             <a:r>
-              <a:rPr lang="en-US" sz="900" dirty="0">
+              <a:rPr lang="en-US" sz="900" b="1" dirty="0">
                 <a:solidFill>
                   <a:srgbClr val="17324D"/>
                 </a:solidFill>
@@ -10978,7 +10952,7 @@
       </p:sp>
       <p:sp>
         <p:nvSpPr>
-          <p:cNvPr id="22" name="Shape 20"/>
+          <p:cNvPr id="21" name="Text 19"/>
           <p:cNvSpPr/>
           <p:nvPr/>
         </p:nvSpPr>
@@ -10999,33 +10973,7 @@
             <a:solidFill>
               <a:srgbClr val="D6DBDF"/>
             </a:solidFill>
-            <a:prstDash val="solid"/>
           </a:ln>
-          <a:effectLst>
-            <a:outerShdw sx="100000" sy="100000" kx="0" ky="0" algn="bl" rotWithShape="0" blurRad="50800" dist="12700" dir="5400000">
-              <a:srgbClr val="1C2E42">
-                <a:alpha val="10000"/>
-              </a:srgbClr>
-            </a:outerShdw>
-          </a:effectLst>
-        </p:spPr>
-      </p:sp>
-      <p:sp>
-        <p:nvSpPr>
-          <p:cNvPr id="23" name="Text 21"/>
-          <p:cNvSpPr/>
-          <p:nvPr/>
-        </p:nvSpPr>
-        <p:spPr>
-          <a:xfrm>
-            <a:off x="2453640" y="1481328"/>
-            <a:ext cx="1447800" cy="384048"/>
-          </a:xfrm>
-          <a:prstGeom prst="rect">
-            <a:avLst/>
-          </a:prstGeom>
-          <a:noFill/>
-          <a:ln/>
         </p:spPr>
         <p:txBody>
           <a:bodyPr wrap="square" rtlCol="0" anchor="ctr"/>
@@ -11035,7 +10983,7 @@
               <a:buNone/>
             </a:pPr>
             <a:r>
-              <a:rPr lang="en-US" sz="900" dirty="0">
+              <a:rPr lang="en-US" sz="900" b="1" dirty="0">
                 <a:solidFill>
                   <a:srgbClr val="17324D"/>
                 </a:solidFill>
@@ -11051,7 +10999,7 @@
       </p:sp>
       <p:sp>
         <p:nvSpPr>
-          <p:cNvPr id="24" name="Shape 22"/>
+          <p:cNvPr id="22" name="Text 20"/>
           <p:cNvSpPr/>
           <p:nvPr/>
         </p:nvSpPr>
@@ -11072,33 +11020,7 @@
             <a:solidFill>
               <a:srgbClr val="D6DBDF"/>
             </a:solidFill>
-            <a:prstDash val="solid"/>
           </a:ln>
-          <a:effectLst>
-            <a:outerShdw sx="100000" sy="100000" kx="0" ky="0" algn="bl" rotWithShape="0" blurRad="50800" dist="12700" dir="5400000">
-              <a:srgbClr val="1C2E42">
-                <a:alpha val="10000"/>
-              </a:srgbClr>
-            </a:outerShdw>
-          </a:effectLst>
-        </p:spPr>
-      </p:sp>
-      <p:sp>
-        <p:nvSpPr>
-          <p:cNvPr id="25" name="Text 23"/>
-          <p:cNvSpPr/>
-          <p:nvPr/>
-        </p:nvSpPr>
-        <p:spPr>
-          <a:xfrm>
-            <a:off x="4221480" y="1481328"/>
-            <a:ext cx="1447800" cy="384048"/>
-          </a:xfrm>
-          <a:prstGeom prst="rect">
-            <a:avLst/>
-          </a:prstGeom>
-          <a:noFill/>
-          <a:ln/>
         </p:spPr>
         <p:txBody>
           <a:bodyPr wrap="square" rtlCol="0" anchor="ctr"/>
@@ -11108,7 +11030,7 @@
               <a:buNone/>
             </a:pPr>
             <a:r>
-              <a:rPr lang="en-US" sz="900" dirty="0">
+              <a:rPr lang="en-US" sz="900" b="1" dirty="0">
                 <a:solidFill>
                   <a:srgbClr val="17324D"/>
                 </a:solidFill>
@@ -11124,7 +11046,7 @@
       </p:sp>
       <p:sp>
         <p:nvSpPr>
-          <p:cNvPr id="26" name="Shape 24"/>
+          <p:cNvPr id="23" name="Text 21"/>
           <p:cNvSpPr/>
           <p:nvPr/>
         </p:nvSpPr>
@@ -11145,33 +11067,7 @@
             <a:solidFill>
               <a:srgbClr val="D6DBDF"/>
             </a:solidFill>
-            <a:prstDash val="solid"/>
           </a:ln>
-          <a:effectLst>
-            <a:outerShdw sx="100000" sy="100000" kx="0" ky="0" algn="bl" rotWithShape="0" blurRad="50800" dist="12700" dir="5400000">
-              <a:srgbClr val="1C2E42">
-                <a:alpha val="10000"/>
-              </a:srgbClr>
-            </a:outerShdw>
-          </a:effectLst>
-        </p:spPr>
-      </p:sp>
-      <p:sp>
-        <p:nvSpPr>
-          <p:cNvPr id="27" name="Text 25"/>
-          <p:cNvSpPr/>
-          <p:nvPr/>
-        </p:nvSpPr>
-        <p:spPr>
-          <a:xfrm>
-            <a:off x="685800" y="1975104"/>
-            <a:ext cx="1447800" cy="384048"/>
-          </a:xfrm>
-          <a:prstGeom prst="rect">
-            <a:avLst/>
-          </a:prstGeom>
-          <a:noFill/>
-          <a:ln/>
         </p:spPr>
         <p:txBody>
           <a:bodyPr wrap="square" rtlCol="0" anchor="ctr"/>
@@ -11181,7 +11077,7 @@
               <a:buNone/>
             </a:pPr>
             <a:r>
-              <a:rPr lang="en-US" sz="900" dirty="0">
+              <a:rPr lang="en-US" sz="900" b="1" dirty="0">
                 <a:solidFill>
                   <a:srgbClr val="17324D"/>
                 </a:solidFill>
@@ -11197,7 +11093,7 @@
       </p:sp>
       <p:sp>
         <p:nvSpPr>
-          <p:cNvPr id="28" name="Shape 26"/>
+          <p:cNvPr id="24" name="Shape 22"/>
           <p:cNvSpPr/>
           <p:nvPr/>
         </p:nvSpPr>
@@ -11231,7 +11127,7 @@
       </p:sp>
       <p:sp>
         <p:nvSpPr>
-          <p:cNvPr id="29" name="Text 27"/>
+          <p:cNvPr id="25" name="Text 23"/>
           <p:cNvSpPr/>
           <p:nvPr/>
         </p:nvSpPr>
@@ -11272,7 +11168,7 @@
       </p:sp>
       <p:sp>
         <p:nvSpPr>
-          <p:cNvPr id="30" name="Shape 28"/>
+          <p:cNvPr id="26" name="Shape 24"/>
           <p:cNvSpPr/>
           <p:nvPr/>
         </p:nvSpPr>
@@ -11306,7 +11202,7 @@
       </p:sp>
       <p:sp>
         <p:nvSpPr>
-          <p:cNvPr id="31" name="Text 29"/>
+          <p:cNvPr id="27" name="Text 25"/>
           <p:cNvSpPr/>
           <p:nvPr/>
         </p:nvSpPr>
@@ -11347,7 +11243,7 @@
       </p:sp>
       <p:sp>
         <p:nvSpPr>
-          <p:cNvPr id="32" name="Shape 30"/>
+          <p:cNvPr id="28" name="Shape 26"/>
           <p:cNvSpPr/>
           <p:nvPr/>
         </p:nvSpPr>
@@ -11381,7 +11277,7 @@
       </p:sp>
       <p:sp>
         <p:nvSpPr>
-          <p:cNvPr id="33" name="Text 31"/>
+          <p:cNvPr id="29" name="Text 27"/>
           <p:cNvSpPr/>
           <p:nvPr/>
         </p:nvSpPr>
@@ -11422,7 +11318,7 @@
       </p:sp>
       <p:sp>
         <p:nvSpPr>
-          <p:cNvPr id="34" name="Text 32"/>
+          <p:cNvPr id="30" name="Text 28"/>
           <p:cNvSpPr/>
           <p:nvPr/>
         </p:nvSpPr>
@@ -11461,7 +11357,7 @@
       </p:sp>
       <p:sp>
         <p:nvSpPr>
-          <p:cNvPr id="35" name="Shape 33"/>
+          <p:cNvPr id="31" name="Shape 29"/>
           <p:cNvSpPr/>
           <p:nvPr/>
         </p:nvSpPr>
@@ -11484,7 +11380,7 @@
       </p:sp>
       <p:sp>
         <p:nvSpPr>
-          <p:cNvPr id="36" name="Shape 34"/>
+          <p:cNvPr id="32" name="Shape 30"/>
           <p:cNvSpPr/>
           <p:nvPr/>
         </p:nvSpPr>
@@ -11507,7 +11403,7 @@
       </p:sp>
       <p:sp>
         <p:nvSpPr>
-          <p:cNvPr id="37" name="Shape 35"/>
+          <p:cNvPr id="33" name="Shape 31"/>
           <p:cNvSpPr/>
           <p:nvPr/>
         </p:nvSpPr>
@@ -11530,7 +11426,7 @@
       </p:sp>
       <p:sp>
         <p:nvSpPr>
-          <p:cNvPr id="38" name="Shape 36"/>
+          <p:cNvPr id="34" name="Shape 32"/>
           <p:cNvSpPr/>
           <p:nvPr/>
         </p:nvSpPr>
@@ -11553,7 +11449,7 @@
       </p:sp>
       <p:sp>
         <p:nvSpPr>
-          <p:cNvPr id="39" name="Shape 37"/>
+          <p:cNvPr id="35" name="Shape 33"/>
           <p:cNvSpPr/>
           <p:nvPr/>
         </p:nvSpPr>

--- a/lessons/4-1/slides.pptx
+++ b/lessons/4-1/slides.pptx
@@ -2495,7 +2495,7 @@
                 <a:ea typeface="Outfit" pitchFamily="34" charset="-122"/>
                 <a:cs typeface="Outfit" pitchFamily="34" charset="-120"/>
               </a:rPr>
-              <a:t>6.RP.2</a:t>
+              <a:t>6.AT.2</a:t>
             </a:r>
             <a:endParaRPr lang="en-US" sz="1000" dirty="0"/>
           </a:p>
@@ -3218,7 +3218,7 @@
                 <a:ea typeface="Outfit" pitchFamily="34" charset="-122"/>
                 <a:cs typeface="Outfit" pitchFamily="34" charset="-120"/>
               </a:rPr>
-              <a:t>6.RP.2</a:t>
+              <a:t>6.AT.2</a:t>
             </a:r>
             <a:endParaRPr lang="en-US" sz="900" dirty="0"/>
           </a:p>
@@ -4328,7 +4328,7 @@
                 <a:ea typeface="Outfit" pitchFamily="34" charset="-122"/>
                 <a:cs typeface="Outfit" pitchFamily="34" charset="-120"/>
               </a:rPr>
-              <a:t>6.RP.2</a:t>
+              <a:t>6.AT.2</a:t>
             </a:r>
             <a:endParaRPr lang="en-US" sz="900" dirty="0"/>
           </a:p>
@@ -5597,7 +5597,7 @@
                 <a:ea typeface="Outfit" pitchFamily="34" charset="-122"/>
                 <a:cs typeface="Outfit" pitchFamily="34" charset="-120"/>
               </a:rPr>
-              <a:t>6.RP.2</a:t>
+              <a:t>6.AT.2</a:t>
             </a:r>
             <a:endParaRPr lang="en-US" sz="900" dirty="0"/>
           </a:p>
@@ -6793,7 +6793,7 @@
                 <a:ea typeface="Outfit" pitchFamily="34" charset="-122"/>
                 <a:cs typeface="Outfit" pitchFamily="34" charset="-120"/>
               </a:rPr>
-              <a:t>6.RP.2</a:t>
+              <a:t>6.AT.2</a:t>
             </a:r>
             <a:endParaRPr lang="en-US" sz="900" dirty="0"/>
           </a:p>
@@ -7855,7 +7855,7 @@
                 <a:ea typeface="Outfit" pitchFamily="34" charset="-122"/>
                 <a:cs typeface="Outfit" pitchFamily="34" charset="-120"/>
               </a:rPr>
-              <a:t>6.RP.2</a:t>
+              <a:t>6.AT.2</a:t>
             </a:r>
             <a:endParaRPr lang="en-US" sz="900" dirty="0"/>
           </a:p>
@@ -8820,7 +8820,7 @@
                 <a:ea typeface="Outfit" pitchFamily="34" charset="-122"/>
                 <a:cs typeface="Outfit" pitchFamily="34" charset="-120"/>
               </a:rPr>
-              <a:t>6.RP.2</a:t>
+              <a:t>6.AT.2</a:t>
             </a:r>
             <a:endParaRPr lang="en-US" sz="900" dirty="0"/>
           </a:p>
@@ -9737,7 +9737,7 @@
                 <a:ea typeface="Outfit" pitchFamily="34" charset="-122"/>
                 <a:cs typeface="Outfit" pitchFamily="34" charset="-120"/>
               </a:rPr>
-              <a:t>6.RP.2</a:t>
+              <a:t>6.AT.2</a:t>
             </a:r>
             <a:endParaRPr lang="en-US" sz="900" dirty="0"/>
           </a:p>
@@ -10865,7 +10865,7 @@
                 <a:ea typeface="Outfit" pitchFamily="34" charset="-122"/>
                 <a:cs typeface="Outfit" pitchFamily="34" charset="-120"/>
               </a:rPr>
-              <a:t>6.RP.2</a:t>
+              <a:t>6.AT.2</a:t>
             </a:r>
             <a:endParaRPr lang="en-US" sz="900" dirty="0"/>
           </a:p>
@@ -12298,7 +12298,7 @@
                 <a:ea typeface="Outfit" pitchFamily="34" charset="-122"/>
                 <a:cs typeface="Outfit" pitchFamily="34" charset="-120"/>
               </a:rPr>
-              <a:t>6.RP.2</a:t>
+              <a:t>6.AT.2</a:t>
             </a:r>
             <a:endParaRPr lang="en-US" sz="900" dirty="0"/>
           </a:p>
@@ -13112,7 +13112,7 @@
                 <a:ea typeface="Outfit" pitchFamily="34" charset="-122"/>
                 <a:cs typeface="Outfit" pitchFamily="34" charset="-120"/>
               </a:rPr>
-              <a:t>6.RP.2</a:t>
+              <a:t>6.AT.2</a:t>
             </a:r>
             <a:endParaRPr lang="en-US" sz="900" dirty="0"/>
           </a:p>
@@ -14172,7 +14172,7 @@
                 <a:ea typeface="Outfit" pitchFamily="34" charset="-122"/>
                 <a:cs typeface="Outfit" pitchFamily="34" charset="-120"/>
               </a:rPr>
-              <a:t>6.RP.2</a:t>
+              <a:t>6.AT.2</a:t>
             </a:r>
             <a:endParaRPr lang="en-US" sz="900" dirty="0"/>
           </a:p>
@@ -15279,7 +15279,7 @@
                 <a:ea typeface="Outfit" pitchFamily="34" charset="-122"/>
                 <a:cs typeface="Outfit" pitchFamily="34" charset="-120"/>
               </a:rPr>
-              <a:t>6.RP.2</a:t>
+              <a:t>6.AT.2</a:t>
             </a:r>
             <a:endParaRPr lang="en-US" sz="900" dirty="0"/>
           </a:p>
@@ -16386,7 +16386,7 @@
                 <a:ea typeface="Outfit" pitchFamily="34" charset="-122"/>
                 <a:cs typeface="Outfit" pitchFamily="34" charset="-120"/>
               </a:rPr>
-              <a:t>6.RP.2</a:t>
+              <a:t>6.AT.2</a:t>
             </a:r>
             <a:endParaRPr lang="en-US" sz="900" dirty="0"/>
           </a:p>
@@ -17446,7 +17446,7 @@
                 <a:ea typeface="Outfit" pitchFamily="34" charset="-122"/>
                 <a:cs typeface="Outfit" pitchFamily="34" charset="-120"/>
               </a:rPr>
-              <a:t>6.RP.2</a:t>
+              <a:t>6.AT.2</a:t>
             </a:r>
             <a:endParaRPr lang="en-US" sz="900" dirty="0"/>
           </a:p>
@@ -18414,7 +18414,7 @@
                 <a:ea typeface="Outfit" pitchFamily="34" charset="-122"/>
                 <a:cs typeface="Outfit" pitchFamily="34" charset="-120"/>
               </a:rPr>
-              <a:t>6.RP.2</a:t>
+              <a:t>6.AT.2</a:t>
             </a:r>
             <a:endParaRPr lang="en-US" sz="900" dirty="0"/>
           </a:p>
@@ -20593,7 +20593,7 @@
                 <a:ea typeface="Outfit" pitchFamily="34" charset="-122"/>
                 <a:cs typeface="Outfit" pitchFamily="34" charset="-120"/>
               </a:rPr>
-              <a:t>6.RP.2</a:t>
+              <a:t>6.AT.2</a:t>
             </a:r>
             <a:endParaRPr lang="en-US" sz="900" dirty="0"/>
           </a:p>

--- a/lessons/4-1/slides.pptx
+++ b/lessons/4-1/slides.pptx
@@ -694,7 +694,7 @@
           <a:p>
             <a:r>
               <a:rPr lang="en-US" dirty="0"/>
-              <a:t>Answer key — To find cost per ticket, divide $8 ÷ 12 = $0.67 per ticket (rounded). The student divided tickets by cost instead of cost by tickets.</a:t>
+              <a:t>Answer key — 0.6% means 0.6 out of 100. Move the decimal two places left: 0.6 → 0.006. The correct answer is 0.6% = 0.006.</a:t>
             </a:r>
             <a:endParaRPr lang="en-US" dirty="0"/>
           </a:p>
@@ -2452,7 +2452,7 @@
                 <a:ea typeface="Outfit" pitchFamily="34" charset="-122"/>
                 <a:cs typeface="Outfit" pitchFamily="34" charset="-120"/>
               </a:rPr>
-              <a:t>Rates and Unit Rates</a:t>
+              <a:t>Percents Greater Than 100% and Less Than 1%</a:t>
             </a:r>
             <a:endParaRPr lang="en-US" sz="3000" dirty="0"/>
           </a:p>
@@ -2495,7 +2495,7 @@
                 <a:ea typeface="Outfit" pitchFamily="34" charset="-122"/>
                 <a:cs typeface="Outfit" pitchFamily="34" charset="-120"/>
               </a:rPr>
-              <a:t>6.AT.2</a:t>
+              <a:t>6.AT.4</a:t>
             </a:r>
             <a:endParaRPr lang="en-US" sz="1000" dirty="0"/>
           </a:p>
@@ -2534,7 +2534,7 @@
                 <a:ea typeface="Hanken Grotesk" pitchFamily="34" charset="-122"/>
                 <a:cs typeface="Hanken Grotesk" pitchFamily="34" charset="-120"/>
               </a:rPr>
-              <a:t>Unit 4  ·  Lesson 4-1</a:t>
+              <a:t>Unit 4  ·  Lesson 4-3</a:t>
             </a:r>
             <a:endParaRPr lang="en-US" sz="1000" dirty="0"/>
           </a:p>
@@ -2919,7 +2919,7 @@
                 <a:ea typeface="Hanken Grotesk" pitchFamily="34" charset="-122"/>
                 <a:cs typeface="Hanken Grotesk" pitchFamily="34" charset="-120"/>
               </a:rPr>
-              <a:t>I can find a unit rate to compare prices and decide the better buy.</a:t>
+              <a:t>I can write and interpret percents greater than 100% and less than 1%.</a:t>
             </a:r>
             <a:endParaRPr lang="en-US" sz="1100" dirty="0"/>
           </a:p>
@@ -3045,7 +3045,7 @@
                 <a:ea typeface="Hanken Grotesk" pitchFamily="34" charset="-122"/>
                 <a:cs typeface="Hanken Grotesk" pitchFamily="34" charset="-120"/>
               </a:rPr>
-              <a:t>I can explain my choice using the words rate, unit rate, per, and better buy.</a:t>
+              <a:t>I can explain my reasoning using the words percent, greater than 100%, less than 1%, and equivalent.</a:t>
             </a:r>
             <a:endParaRPr lang="en-US" sz="1050" dirty="0"/>
           </a:p>
@@ -3218,7 +3218,7 @@
                 <a:ea typeface="Outfit" pitchFamily="34" charset="-122"/>
                 <a:cs typeface="Outfit" pitchFamily="34" charset="-120"/>
               </a:rPr>
-              <a:t>6.AT.2</a:t>
+              <a:t>6.AT.4</a:t>
             </a:r>
             <a:endParaRPr lang="en-US" sz="900" dirty="0"/>
           </a:p>
@@ -3437,7 +3437,7 @@
                 <a:ea typeface="Hanken Grotesk" pitchFamily="34" charset="-122"/>
                 <a:cs typeface="Hanken Grotesk" pitchFamily="34" charset="-120"/>
               </a:rPr>
-              <a:t>Reveal Math Grade 6  ·  Unit 4  ·  Lesson 4-1</a:t>
+              <a:t>Reveal Math Grade 6  ·  Unit 4  ·  Lesson 4-3</a:t>
             </a:r>
             <a:endParaRPr lang="en-US" sz="750" dirty="0"/>
           </a:p>
@@ -3549,7 +3549,7 @@
                 <a:ea typeface="Outfit" pitchFamily="34" charset="-122"/>
                 <a:cs typeface="Outfit" pitchFamily="34" charset="-120"/>
               </a:rPr>
-              <a:t>Calculate the unit rate (cost per game) for each arcade booth. Divide the total cost by the number of games.</a:t>
+              <a:t>Sort each value into the correct category: Greater than 100%, Between 1% and 100%, or Less than 1%.</a:t>
             </a:r>
             <a:endParaRPr lang="en-US" sz="1050" dirty="0"/>
           </a:p>
@@ -3635,7 +3635,7 @@
                 <a:ea typeface="Hanken Grotesk" pitchFamily="34" charset="-122"/>
                 <a:cs typeface="Hanken Grotesk" pitchFamily="34" charset="-120"/>
               </a:rPr>
-              <a:t>Card 1</a:t>
+              <a:t>150%</a:t>
             </a:r>
             <a:endParaRPr lang="en-US" sz="900" dirty="0"/>
           </a:p>
@@ -3682,7 +3682,7 @@
                 <a:ea typeface="Hanken Grotesk" pitchFamily="34" charset="-122"/>
                 <a:cs typeface="Hanken Grotesk" pitchFamily="34" charset="-120"/>
               </a:rPr>
-              <a:t>Card 2</a:t>
+              <a:t>200%</a:t>
             </a:r>
             <a:endParaRPr lang="en-US" sz="900" dirty="0"/>
           </a:p>
@@ -3729,7 +3729,7 @@
                 <a:ea typeface="Hanken Grotesk" pitchFamily="34" charset="-122"/>
                 <a:cs typeface="Hanken Grotesk" pitchFamily="34" charset="-120"/>
               </a:rPr>
-              <a:t>Card 3</a:t>
+              <a:t>350%</a:t>
             </a:r>
             <a:endParaRPr lang="en-US" sz="900" dirty="0"/>
           </a:p>
@@ -3776,7 +3776,7 @@
                 <a:ea typeface="Hanken Grotesk" pitchFamily="34" charset="-122"/>
                 <a:cs typeface="Hanken Grotesk" pitchFamily="34" charset="-120"/>
               </a:rPr>
-              <a:t>Card 4</a:t>
+              <a:t>120%</a:t>
             </a:r>
             <a:endParaRPr lang="en-US" sz="900" dirty="0"/>
           </a:p>
@@ -3784,18 +3784,112 @@
       </p:sp>
       <p:sp>
         <p:nvSpPr>
-          <p:cNvPr id="24" name="Shape 22"/>
-          <p:cNvSpPr/>
-          <p:nvPr/>
-        </p:nvSpPr>
-        <p:spPr>
-          <a:xfrm>
-            <a:off x="594360" y="2560320"/>
-            <a:ext cx="2514600" cy="1965960"/>
+          <p:cNvPr id="24" name="Text 22"/>
+          <p:cNvSpPr/>
+          <p:nvPr/>
+        </p:nvSpPr>
+        <p:spPr>
+          <a:xfrm>
+            <a:off x="2362200" y="1975104"/>
+            <a:ext cx="1630680" cy="384048"/>
           </a:xfrm>
           <a:prstGeom prst="roundRect">
             <a:avLst>
-              <a:gd name="adj" fmla="val 2326"/>
+              <a:gd name="adj" fmla="val 11905"/>
+            </a:avLst>
+          </a:prstGeom>
+          <a:solidFill>
+            <a:srgbClr val="FBEFD0"/>
+          </a:solidFill>
+          <a:ln w="12700">
+            <a:solidFill>
+              <a:srgbClr val="D6DBDF"/>
+            </a:solidFill>
+          </a:ln>
+        </p:spPr>
+        <p:txBody>
+          <a:bodyPr wrap="square" rtlCol="0" anchor="ctr"/>
+          <a:lstStyle/>
+          <a:p>
+            <a:pPr algn="ctr" indent="0" marL="0">
+              <a:buNone/>
+            </a:pPr>
+            <a:r>
+              <a:rPr lang="en-US" sz="900" b="1" dirty="0">
+                <a:solidFill>
+                  <a:srgbClr val="17324D"/>
+                </a:solidFill>
+                <a:latin typeface="Hanken Grotesk" pitchFamily="34" charset="0"/>
+                <a:ea typeface="Hanken Grotesk" pitchFamily="34" charset="-122"/>
+                <a:cs typeface="Hanken Grotesk" pitchFamily="34" charset="-120"/>
+              </a:rPr>
+              <a:t>45%</a:t>
+            </a:r>
+            <a:endParaRPr lang="en-US" sz="900" dirty="0"/>
+          </a:p>
+        </p:txBody>
+      </p:sp>
+      <p:sp>
+        <p:nvSpPr>
+          <p:cNvPr id="25" name="Text 23"/>
+          <p:cNvSpPr/>
+          <p:nvPr/>
+        </p:nvSpPr>
+        <p:spPr>
+          <a:xfrm>
+            <a:off x="4130040" y="1975104"/>
+            <a:ext cx="1630680" cy="384048"/>
+          </a:xfrm>
+          <a:prstGeom prst="roundRect">
+            <a:avLst>
+              <a:gd name="adj" fmla="val 11905"/>
+            </a:avLst>
+          </a:prstGeom>
+          <a:solidFill>
+            <a:srgbClr val="FBEFD0"/>
+          </a:solidFill>
+          <a:ln w="12700">
+            <a:solidFill>
+              <a:srgbClr val="D6DBDF"/>
+            </a:solidFill>
+          </a:ln>
+        </p:spPr>
+        <p:txBody>
+          <a:bodyPr wrap="square" rtlCol="0" anchor="ctr"/>
+          <a:lstStyle/>
+          <a:p>
+            <a:pPr algn="ctr" indent="0" marL="0">
+              <a:buNone/>
+            </a:pPr>
+            <a:r>
+              <a:rPr lang="en-US" sz="900" b="1" dirty="0">
+                <a:solidFill>
+                  <a:srgbClr val="17324D"/>
+                </a:solidFill>
+                <a:latin typeface="Hanken Grotesk" pitchFamily="34" charset="0"/>
+                <a:ea typeface="Hanken Grotesk" pitchFamily="34" charset="-122"/>
+                <a:cs typeface="Hanken Grotesk" pitchFamily="34" charset="-120"/>
+              </a:rPr>
+              <a:t>75%</a:t>
+            </a:r>
+            <a:endParaRPr lang="en-US" sz="900" dirty="0"/>
+          </a:p>
+        </p:txBody>
+      </p:sp>
+      <p:sp>
+        <p:nvSpPr>
+          <p:cNvPr id="26" name="Shape 24"/>
+          <p:cNvSpPr/>
+          <p:nvPr/>
+        </p:nvSpPr>
+        <p:spPr>
+          <a:xfrm>
+            <a:off x="594360" y="2560320"/>
+            <a:ext cx="1630680" cy="1965960"/>
+          </a:xfrm>
+          <a:prstGeom prst="roundRect">
+            <a:avLst>
+              <a:gd name="adj" fmla="val 2804"/>
             </a:avLst>
           </a:prstGeom>
           <a:solidFill>
@@ -3818,14 +3912,14 @@
       </p:sp>
       <p:sp>
         <p:nvSpPr>
-          <p:cNvPr id="25" name="Text 23"/>
+          <p:cNvPr id="27" name="Text 25"/>
           <p:cNvSpPr/>
           <p:nvPr/>
         </p:nvSpPr>
         <p:spPr>
           <a:xfrm>
             <a:off x="594360" y="2560320"/>
-            <a:ext cx="2514600" cy="292608"/>
+            <a:ext cx="1630680" cy="292608"/>
           </a:xfrm>
           <a:prstGeom prst="rect">
             <a:avLst/>
@@ -3851,7 +3945,7 @@
                 <a:ea typeface="Outfit" pitchFamily="34" charset="-122"/>
                 <a:cs typeface="Outfit" pitchFamily="34" charset="-120"/>
               </a:rPr>
-              <a:t>Group A</a:t>
+              <a:t>Greater than 100%</a:t>
             </a:r>
             <a:endParaRPr lang="en-US" sz="950" dirty="0"/>
           </a:p>
@@ -3859,18 +3953,18 @@
       </p:sp>
       <p:sp>
         <p:nvSpPr>
-          <p:cNvPr id="26" name="Shape 24"/>
-          <p:cNvSpPr/>
-          <p:nvPr/>
-        </p:nvSpPr>
-        <p:spPr>
-          <a:xfrm>
-            <a:off x="3246120" y="2560320"/>
-            <a:ext cx="2514600" cy="1965960"/>
+          <p:cNvPr id="28" name="Shape 26"/>
+          <p:cNvSpPr/>
+          <p:nvPr/>
+        </p:nvSpPr>
+        <p:spPr>
+          <a:xfrm>
+            <a:off x="2362200" y="2560320"/>
+            <a:ext cx="1630680" cy="1965960"/>
           </a:xfrm>
           <a:prstGeom prst="roundRect">
             <a:avLst>
-              <a:gd name="adj" fmla="val 2326"/>
+              <a:gd name="adj" fmla="val 2804"/>
             </a:avLst>
           </a:prstGeom>
           <a:solidFill>
@@ -3893,14 +3987,14 @@
       </p:sp>
       <p:sp>
         <p:nvSpPr>
-          <p:cNvPr id="27" name="Text 25"/>
-          <p:cNvSpPr/>
-          <p:nvPr/>
-        </p:nvSpPr>
-        <p:spPr>
-          <a:xfrm>
-            <a:off x="3246120" y="2560320"/>
-            <a:ext cx="2514600" cy="292608"/>
+          <p:cNvPr id="29" name="Text 27"/>
+          <p:cNvSpPr/>
+          <p:nvPr/>
+        </p:nvSpPr>
+        <p:spPr>
+          <a:xfrm>
+            <a:off x="2362200" y="2560320"/>
+            <a:ext cx="1630680" cy="292608"/>
           </a:xfrm>
           <a:prstGeom prst="rect">
             <a:avLst/>
@@ -3926,7 +4020,7 @@
                 <a:ea typeface="Outfit" pitchFamily="34" charset="-122"/>
                 <a:cs typeface="Outfit" pitchFamily="34" charset="-120"/>
               </a:rPr>
-              <a:t>Group B</a:t>
+              <a:t>Between 1% and 100%</a:t>
             </a:r>
             <a:endParaRPr lang="en-US" sz="950" dirty="0"/>
           </a:p>
@@ -3934,7 +4028,82 @@
       </p:sp>
       <p:sp>
         <p:nvSpPr>
-          <p:cNvPr id="28" name="Shape 26"/>
+          <p:cNvPr id="30" name="Shape 28"/>
+          <p:cNvSpPr/>
+          <p:nvPr/>
+        </p:nvSpPr>
+        <p:spPr>
+          <a:xfrm>
+            <a:off x="4130040" y="2560320"/>
+            <a:ext cx="1630680" cy="1965960"/>
+          </a:xfrm>
+          <a:prstGeom prst="roundRect">
+            <a:avLst>
+              <a:gd name="adj" fmla="val 2804"/>
+            </a:avLst>
+          </a:prstGeom>
+          <a:solidFill>
+            <a:srgbClr val="FFFFFF"/>
+          </a:solidFill>
+          <a:ln w="12700">
+            <a:solidFill>
+              <a:srgbClr val="B0883B"/>
+            </a:solidFill>
+            <a:prstDash val="solid"/>
+          </a:ln>
+          <a:effectLst>
+            <a:outerShdw sx="100000" sy="100000" kx="0" ky="0" algn="bl" rotWithShape="0" blurRad="50800" dist="12700" dir="5400000">
+              <a:srgbClr val="1C2E42">
+                <a:alpha val="10000"/>
+              </a:srgbClr>
+            </a:outerShdw>
+          </a:effectLst>
+        </p:spPr>
+      </p:sp>
+      <p:sp>
+        <p:nvSpPr>
+          <p:cNvPr id="31" name="Text 29"/>
+          <p:cNvSpPr/>
+          <p:nvPr/>
+        </p:nvSpPr>
+        <p:spPr>
+          <a:xfrm>
+            <a:off x="4130040" y="2560320"/>
+            <a:ext cx="1630680" cy="292608"/>
+          </a:xfrm>
+          <a:prstGeom prst="rect">
+            <a:avLst/>
+          </a:prstGeom>
+          <a:solidFill>
+            <a:srgbClr val="B0883B"/>
+          </a:solidFill>
+          <a:ln/>
+        </p:spPr>
+        <p:txBody>
+          <a:bodyPr wrap="square" rtlCol="0" anchor="ctr"/>
+          <a:lstStyle/>
+          <a:p>
+            <a:pPr algn="ctr" indent="0" marL="0">
+              <a:buNone/>
+            </a:pPr>
+            <a:r>
+              <a:rPr lang="en-US" sz="950" b="1" dirty="0">
+                <a:solidFill>
+                  <a:srgbClr val="FFFFFF"/>
+                </a:solidFill>
+                <a:latin typeface="Outfit" pitchFamily="34" charset="0"/>
+                <a:ea typeface="Outfit" pitchFamily="34" charset="-122"/>
+                <a:cs typeface="Outfit" pitchFamily="34" charset="-120"/>
+              </a:rPr>
+              <a:t>Less than 1%</a:t>
+            </a:r>
+            <a:endParaRPr lang="en-US" sz="950" dirty="0"/>
+          </a:p>
+        </p:txBody>
+      </p:sp>
+      <p:sp>
+        <p:nvSpPr>
+          <p:cNvPr id="32" name="Shape 30"/>
           <p:cNvSpPr/>
           <p:nvPr/>
         </p:nvSpPr>
@@ -3968,7 +4137,7 @@
       </p:sp>
       <p:sp>
         <p:nvSpPr>
-          <p:cNvPr id="29" name="Text 27"/>
+          <p:cNvPr id="33" name="Text 31"/>
           <p:cNvSpPr/>
           <p:nvPr/>
         </p:nvSpPr>
@@ -4009,7 +4178,7 @@
       </p:sp>
       <p:sp>
         <p:nvSpPr>
-          <p:cNvPr id="30" name="Text 28"/>
+          <p:cNvPr id="34" name="Text 32"/>
           <p:cNvSpPr/>
           <p:nvPr/>
         </p:nvSpPr>
@@ -4040,7 +4209,7 @@
                 <a:ea typeface="Hanken Grotesk" pitchFamily="34" charset="-122"/>
                 <a:cs typeface="Hanken Grotesk" pitchFamily="34" charset="-120"/>
               </a:rPr>
-              <a:t>How did you find the cost per game (the unit rate) for each booth, and what did you divide?</a:t>
+              <a:t>When you wrote percents like 150% and 0.5% as decimals, what did you notice about their size compared to 1?</a:t>
             </a:r>
             <a:endParaRPr lang="en-US" sz="1000" dirty="0"/>
           </a:p>
@@ -4048,7 +4217,7 @@
       </p:sp>
       <p:sp>
         <p:nvSpPr>
-          <p:cNvPr id="31" name="Shape 29"/>
+          <p:cNvPr id="35" name="Shape 33"/>
           <p:cNvSpPr/>
           <p:nvPr/>
         </p:nvSpPr>
@@ -4071,7 +4240,7 @@
       </p:sp>
       <p:sp>
         <p:nvSpPr>
-          <p:cNvPr id="32" name="Shape 30"/>
+          <p:cNvPr id="36" name="Shape 34"/>
           <p:cNvSpPr/>
           <p:nvPr/>
         </p:nvSpPr>
@@ -4094,7 +4263,7 @@
       </p:sp>
       <p:sp>
         <p:nvSpPr>
-          <p:cNvPr id="33" name="Shape 31"/>
+          <p:cNvPr id="37" name="Shape 35"/>
           <p:cNvSpPr/>
           <p:nvPr/>
         </p:nvSpPr>
@@ -4117,7 +4286,7 @@
       </p:sp>
       <p:sp>
         <p:nvSpPr>
-          <p:cNvPr id="34" name="Shape 32"/>
+          <p:cNvPr id="38" name="Shape 36"/>
           <p:cNvSpPr/>
           <p:nvPr/>
         </p:nvSpPr>
@@ -4140,7 +4309,7 @@
       </p:sp>
       <p:sp>
         <p:nvSpPr>
-          <p:cNvPr id="35" name="Shape 33"/>
+          <p:cNvPr id="39" name="Shape 37"/>
           <p:cNvSpPr/>
           <p:nvPr/>
         </p:nvSpPr>
@@ -4328,7 +4497,7 @@
                 <a:ea typeface="Outfit" pitchFamily="34" charset="-122"/>
                 <a:cs typeface="Outfit" pitchFamily="34" charset="-120"/>
               </a:rPr>
-              <a:t>6.AT.2</a:t>
+              <a:t>6.AT.4</a:t>
             </a:r>
             <a:endParaRPr lang="en-US" sz="900" dirty="0"/>
           </a:p>
@@ -4547,7 +4716,7 @@
                 <a:ea typeface="Hanken Grotesk" pitchFamily="34" charset="-122"/>
                 <a:cs typeface="Hanken Grotesk" pitchFamily="34" charset="-120"/>
               </a:rPr>
-              <a:t>Reveal Math Grade 6  ·  Unit 4  ·  Lesson 4-1</a:t>
+              <a:t>Reveal Math Grade 6  ·  Unit 4  ·  Lesson 4-3</a:t>
             </a:r>
             <a:endParaRPr lang="en-US" sz="750" dirty="0"/>
           </a:p>
@@ -4702,7 +4871,7 @@
                 <a:ea typeface="Outfit" pitchFamily="34" charset="-122"/>
                 <a:cs typeface="Outfit" pitchFamily="34" charset="-120"/>
               </a:rPr>
-              <a:t>Find the Rate Error</a:t>
+              <a:t>Find the Percent Error</a:t>
             </a:r>
             <a:endParaRPr lang="en-US" sz="1100" dirty="0"/>
           </a:p>
@@ -4867,7 +5036,7 @@
                 <a:ea typeface="Hanken Grotesk" pitchFamily="34" charset="-122"/>
                 <a:cs typeface="Hanken Grotesk" pitchFamily="34" charset="-120"/>
               </a:rPr>
-              <a:t>Find the unit rate: 12 tickets for $8:  </a:t>
+              <a:t>Convert 0.6% to a decimal:  </a:t>
             </a:r>
             <a:pPr indent="0" marL="0">
               <a:buNone/>
@@ -4881,7 +5050,7 @@
                 <a:ea typeface="Courier New" pitchFamily="34" charset="-122"/>
                 <a:cs typeface="Courier New" pitchFamily="34" charset="-120"/>
               </a:rPr>
-              <a:t>12 tickets for $8</a:t>
+              <a:t>0.6%</a:t>
             </a:r>
             <a:endParaRPr lang="en-US" sz="950" dirty="0"/>
           </a:p>
@@ -4934,7 +5103,7 @@
                 <a:ea typeface="Hanken Grotesk" pitchFamily="34" charset="-122"/>
                 <a:cs typeface="Hanken Grotesk" pitchFamily="34" charset="-120"/>
               </a:rPr>
-              <a:t>Set up the division:  </a:t>
+              <a:t>Move the decimal two places left:  </a:t>
             </a:r>
             <a:pPr indent="0" marL="0">
               <a:buNone/>
@@ -4948,7 +5117,7 @@
                 <a:ea typeface="Courier New" pitchFamily="34" charset="-122"/>
                 <a:cs typeface="Courier New" pitchFamily="34" charset="-120"/>
               </a:rPr>
-              <a:t>12 ÷ 8 = 1.5</a:t>
+              <a:t>0.6 → 0.06</a:t>
             </a:r>
             <a:endParaRPr lang="en-US" sz="950" dirty="0"/>
           </a:p>
@@ -5001,7 +5170,7 @@
                 <a:ea typeface="Hanken Grotesk" pitchFamily="34" charset="-122"/>
                 <a:cs typeface="Hanken Grotesk" pitchFamily="34" charset="-120"/>
               </a:rPr>
-              <a:t>Write the unit rate:  </a:t>
+              <a:t>Final answer:  </a:t>
             </a:r>
             <a:pPr indent="0" marL="0">
               <a:buNone/>
@@ -5015,7 +5184,7 @@
                 <a:ea typeface="Courier New" pitchFamily="34" charset="-122"/>
                 <a:cs typeface="Courier New" pitchFamily="34" charset="-120"/>
               </a:rPr>
-              <a:t>The unit rate is $1.50 per ticket</a:t>
+              <a:t>0.6% = 0.06</a:t>
             </a:r>
             <a:endParaRPr lang="en-US" sz="950" dirty="0"/>
           </a:p>
@@ -5597,7 +5766,7 @@
                 <a:ea typeface="Outfit" pitchFamily="34" charset="-122"/>
                 <a:cs typeface="Outfit" pitchFamily="34" charset="-120"/>
               </a:rPr>
-              <a:t>6.AT.2</a:t>
+              <a:t>6.AT.4</a:t>
             </a:r>
             <a:endParaRPr lang="en-US" sz="900" dirty="0"/>
           </a:p>
@@ -5816,7 +5985,7 @@
                 <a:ea typeface="Hanken Grotesk" pitchFamily="34" charset="-122"/>
                 <a:cs typeface="Hanken Grotesk" pitchFamily="34" charset="-120"/>
               </a:rPr>
-              <a:t>Reveal Math Grade 6  ·  Unit 4  ·  Lesson 4-1</a:t>
+              <a:t>Reveal Math Grade 6  ·  Unit 4  ·  Lesson 4-3</a:t>
             </a:r>
             <a:endParaRPr lang="en-US" sz="750" dirty="0"/>
           </a:p>
@@ -6028,7 +6197,7 @@
                 <a:ea typeface="Hanken Grotesk" pitchFamily="34" charset="-122"/>
                 <a:cs typeface="Hanken Grotesk" pitchFamily="34" charset="-120"/>
               </a:rPr>
-              <a:t>Booth A charges $3 for 5 games. I want the cost for just 1 game.</a:t>
+              <a:t>A player hit 150% of the goal. I want this as a decimal.</a:t>
             </a:r>
             <a:endParaRPr lang="en-US" sz="1050" dirty="0"/>
           </a:p>
@@ -6126,7 +6295,7 @@
                 <a:ea typeface="Hanken Grotesk" pitchFamily="34" charset="-122"/>
                 <a:cs typeface="Hanken Grotesk" pitchFamily="34" charset="-120"/>
               </a:rPr>
-              <a:t>I divide the cost by the games: $3 ÷ 5 = $0.60.</a:t>
+              <a:t>I divide by 100: 150 ÷ 100 = 1.5.</a:t>
             </a:r>
             <a:endParaRPr lang="en-US" sz="1050" dirty="0"/>
           </a:p>
@@ -6224,7 +6393,7 @@
                 <a:ea typeface="Hanken Grotesk" pitchFamily="34" charset="-122"/>
                 <a:cs typeface="Hanken Grotesk" pitchFamily="34" charset="-120"/>
               </a:rPr>
-              <a:t>So Booth A costs $0.60 per game. That is the unit rate.</a:t>
+              <a:t>Since 1.5 is more than 1, this player beat the whole goal.</a:t>
             </a:r>
             <a:endParaRPr lang="en-US" sz="1050" dirty="0"/>
           </a:p>
@@ -6322,7 +6491,7 @@
                 <a:ea typeface="Hanken Grotesk" pitchFamily="34" charset="-122"/>
                 <a:cs typeface="Hanken Grotesk" pitchFamily="34" charset="-120"/>
               </a:rPr>
-              <a:t>Now I can compare this booth fairly with any other booth.</a:t>
+              <a:t>Now a tiny boost of 0.5%: 0.5 ÷ 100 = 0.005, much less than 1.</a:t>
             </a:r>
             <a:endParaRPr lang="en-US" sz="1050" dirty="0"/>
           </a:p>
@@ -6793,7 +6962,7 @@
                 <a:ea typeface="Outfit" pitchFamily="34" charset="-122"/>
                 <a:cs typeface="Outfit" pitchFamily="34" charset="-120"/>
               </a:rPr>
-              <a:t>6.AT.2</a:t>
+              <a:t>6.AT.4</a:t>
             </a:r>
             <a:endParaRPr lang="en-US" sz="900" dirty="0"/>
           </a:p>
@@ -7012,7 +7181,7 @@
                 <a:ea typeface="Hanken Grotesk" pitchFamily="34" charset="-122"/>
                 <a:cs typeface="Hanken Grotesk" pitchFamily="34" charset="-120"/>
               </a:rPr>
-              <a:t>Reveal Math Grade 6  ·  Unit 4  ·  Lesson 4-1</a:t>
+              <a:t>Reveal Math Grade 6  ·  Unit 4  ·  Lesson 4-3</a:t>
             </a:r>
             <a:endParaRPr lang="en-US" sz="750" dirty="0"/>
           </a:p>
@@ -7238,7 +7407,7 @@
                 <a:ea typeface="Hanken Grotesk" pitchFamily="34" charset="-122"/>
                 <a:cs typeface="Hanken Grotesk" pitchFamily="34" charset="-120"/>
               </a:rPr>
-              <a:t>Sketch a model for today's problem. Label it using Rate and Unit Rate.</a:t>
+              <a:t>Sketch a model for today's problem. Label it using Percent and Greater than 100%.</a:t>
             </a:r>
             <a:endParaRPr lang="en-US" sz="1000" dirty="0"/>
           </a:p>
@@ -7386,7 +7555,7 @@
                 <a:ea typeface="Hanken Grotesk" pitchFamily="34" charset="-122"/>
                 <a:cs typeface="Hanken Grotesk" pitchFamily="34" charset="-120"/>
               </a:rPr>
-              <a:t>In 2–3 sentences, explain "To find a unit rate, divide the total cost by the number of items. The lower cost per item is the better buy." in your own words.</a:t>
+              <a:t>In 2–3 sentences, explain "To change any percent to a decimal, divide by 100 (move the decimal point two places to the left)." in your own words.</a:t>
             </a:r>
             <a:endParaRPr lang="en-US" sz="1000" dirty="0"/>
           </a:p>
@@ -7682,7 +7851,7 @@
                 <a:ea typeface="Hanken Grotesk" pitchFamily="34" charset="-122"/>
                 <a:cs typeface="Hanken Grotesk" pitchFamily="34" charset="-120"/>
               </a:rPr>
-              <a:t>Write your own problem that uses Rate, then solve it and make an answer key.</a:t>
+              <a:t>Write your own problem that uses Percent, then solve it and make an answer key.</a:t>
             </a:r>
             <a:endParaRPr lang="en-US" sz="1000" dirty="0"/>
           </a:p>
@@ -7855,7 +8024,7 @@
                 <a:ea typeface="Outfit" pitchFamily="34" charset="-122"/>
                 <a:cs typeface="Outfit" pitchFamily="34" charset="-120"/>
               </a:rPr>
-              <a:t>6.AT.2</a:t>
+              <a:t>6.AT.4</a:t>
             </a:r>
             <a:endParaRPr lang="en-US" sz="900" dirty="0"/>
           </a:p>
@@ -8074,7 +8243,7 @@
                 <a:ea typeface="Hanken Grotesk" pitchFamily="34" charset="-122"/>
                 <a:cs typeface="Hanken Grotesk" pitchFamily="34" charset="-120"/>
               </a:rPr>
-              <a:t>Reveal Math Grade 6  ·  Unit 4  ·  Lesson 4-1</a:t>
+              <a:t>Reveal Math Grade 6  ·  Unit 4  ·  Lesson 4-3</a:t>
             </a:r>
             <a:endParaRPr lang="en-US" sz="750" dirty="0"/>
           </a:p>
@@ -8243,7 +8412,7 @@
                 <a:ea typeface="Hanken Grotesk" pitchFamily="34" charset="-122"/>
                 <a:cs typeface="Hanken Grotesk" pitchFamily="34" charset="-120"/>
               </a:rPr>
-              <a:t>Which token pack from the table above is the best deal?</a:t>
+              <a:t>A player scored 0.4% of the bonus points. Which decimal represents this percent?</a:t>
             </a:r>
             <a:endParaRPr lang="en-US" sz="1050" dirty="0"/>
           </a:p>
@@ -8319,7 +8488,7 @@
                 <a:ea typeface="Hanken Grotesk" pitchFamily="34" charset="-122"/>
                 <a:cs typeface="Hanken Grotesk" pitchFamily="34" charset="-120"/>
               </a:rPr>
-              <a:t>Runner A completes 4 laps in 12 minutes. Runner B completes 5 laps in 14 minutes. Who runs more laps per minute?</a:t>
+              <a:t>Which of the following is greater than 100%?</a:t>
             </a:r>
             <a:endParaRPr lang="en-US" sz="1050" dirty="0"/>
           </a:p>
@@ -8395,7 +8564,7 @@
                 <a:ea typeface="Hanken Grotesk" pitchFamily="34" charset="-122"/>
                 <a:cs typeface="Hanken Grotesk" pitchFamily="34" charset="-120"/>
               </a:rPr>
-              <a:t>A booth charges $4.50 for 9 games. What is the unit rate?</a:t>
+              <a:t>What is 200% written as a decimal?</a:t>
             </a:r>
             <a:endParaRPr lang="en-US" sz="1050" dirty="0"/>
           </a:p>
@@ -8532,7 +8701,7 @@
                 <a:ea typeface="Hanken Grotesk" pitchFamily="34" charset="-122"/>
                 <a:cs typeface="Hanken Grotesk" pitchFamily="34" charset="-120"/>
               </a:rPr>
-              <a:t>The snack bar sells popcorn as 3 cups for $2.25 or 8 cups for $5.60. How do unit rates help you decide the better buy?</a:t>
+              <a:t>A jackpot pays 250% of your tokens and you inserted 40 tokens. One friend says 100 tokens, another says 60. Who is right, and why does '250%' mean more than your tokens?</a:t>
             </a:r>
             <a:endParaRPr lang="en-US" sz="1000" dirty="0"/>
           </a:p>
@@ -8820,7 +8989,7 @@
                 <a:ea typeface="Outfit" pitchFamily="34" charset="-122"/>
                 <a:cs typeface="Outfit" pitchFamily="34" charset="-120"/>
               </a:rPr>
-              <a:t>6.AT.2</a:t>
+              <a:t>6.AT.4</a:t>
             </a:r>
             <a:endParaRPr lang="en-US" sz="900" dirty="0"/>
           </a:p>
@@ -9039,7 +9208,7 @@
                 <a:ea typeface="Hanken Grotesk" pitchFamily="34" charset="-122"/>
                 <a:cs typeface="Hanken Grotesk" pitchFamily="34" charset="-120"/>
               </a:rPr>
-              <a:t>Reveal Math Grade 6  ·  Unit 4  ·  Lesson 4-1</a:t>
+              <a:t>Reveal Math Grade 6  ·  Unit 4  ·  Lesson 4-3</a:t>
             </a:r>
             <a:endParaRPr lang="en-US" sz="750" dirty="0"/>
           </a:p>
@@ -9243,7 +9412,7 @@
                 <a:ea typeface="Hanken Grotesk" pitchFamily="34" charset="-122"/>
                 <a:cs typeface="Hanken Grotesk" pitchFamily="34" charset="-120"/>
               </a:rPr>
-              <a:t>Today's key idea is "To find a unit rate, divide the total cost by the number of items. The lower cost per item is the better buy." — and it works because ___.</a:t>
+              <a:t>Today's key idea is "To change any percent to a decimal, divide by 100 (move the decimal point two places to the left)." — and it works because ___.</a:t>
             </a:r>
             <a:endParaRPr lang="en-US" sz="1050" dirty="0"/>
           </a:p>
@@ -9392,7 +9561,7 @@
                 <a:ea typeface="Hanken Grotesk" pitchFamily="34" charset="-122"/>
                 <a:cs typeface="Hanken Grotesk" pitchFamily="34" charset="-120"/>
               </a:rPr>
-              <a:t>Because Rate means ___, but a tricky part is ___, so I have to ___.</a:t>
+              <a:t>Because Percent means ___, but a tricky part is ___, so I have to ___.</a:t>
             </a:r>
             <a:endParaRPr lang="en-US" sz="1050" dirty="0"/>
           </a:p>
@@ -9541,7 +9710,7 @@
                 <a:ea typeface="Hanken Grotesk" pitchFamily="34" charset="-122"/>
                 <a:cs typeface="Hanken Grotesk" pitchFamily="34" charset="-120"/>
               </a:rPr>
-              <a:t>A common mistake with Rate is ___. It happens because ___, and the fix is ___.</a:t>
+              <a:t>A common mistake with Percent is ___. It happens because ___, and the fix is ___.</a:t>
             </a:r>
             <a:endParaRPr lang="en-US" sz="1050" dirty="0"/>
           </a:p>
@@ -9737,7 +9906,7 @@
                 <a:ea typeface="Outfit" pitchFamily="34" charset="-122"/>
                 <a:cs typeface="Outfit" pitchFamily="34" charset="-120"/>
               </a:rPr>
-              <a:t>6.AT.2</a:t>
+              <a:t>6.AT.4</a:t>
             </a:r>
             <a:endParaRPr lang="en-US" sz="900" dirty="0"/>
           </a:p>
@@ -9956,7 +10125,7 @@
                 <a:ea typeface="Hanken Grotesk" pitchFamily="34" charset="-122"/>
                 <a:cs typeface="Hanken Grotesk" pitchFamily="34" charset="-120"/>
               </a:rPr>
-              <a:t>Reveal Math Grade 6  ·  Unit 4  ·  Lesson 4-1</a:t>
+              <a:t>Reveal Math Grade 6  ·  Unit 4  ·  Lesson 4-3</a:t>
             </a:r>
             <a:endParaRPr lang="en-US" sz="750" dirty="0"/>
           </a:p>
@@ -10414,7 +10583,7 @@
                 <a:ea typeface="Hanken Grotesk" pitchFamily="34" charset="-122"/>
                 <a:cs typeface="Hanken Grotesk" pitchFamily="34" charset="-120"/>
               </a:rPr>
-              <a:t>A store sells 6 pencils for $1.50 and 10 pencils for $2.80. Which is the better buy?</a:t>
+              <a:t>Which statement is true about 0.25%?</a:t>
             </a:r>
             <a:endParaRPr lang="en-US" sz="1050" dirty="0"/>
           </a:p>
@@ -10453,7 +10622,7 @@
                 <a:ea typeface="Hanken Grotesk" pitchFamily="34" charset="-122"/>
                 <a:cs typeface="Hanken Grotesk" pitchFamily="34" charset="-120"/>
               </a:rPr>
-              <a:t>A.  6 for $1.50 — $0.25 each</a:t>
+              <a:t>A.  It equals 0.0025 as a decimal</a:t>
             </a:r>
             <a:endParaRPr lang="en-US" sz="1000" dirty="0"/>
           </a:p>
@@ -10492,7 +10661,7 @@
                 <a:ea typeface="Hanken Grotesk" pitchFamily="34" charset="-122"/>
                 <a:cs typeface="Hanken Grotesk" pitchFamily="34" charset="-120"/>
               </a:rPr>
-              <a:t>B.  10 for $2.80 — $0.28 each</a:t>
+              <a:t>B.  It equals 0.25 as a decimal</a:t>
             </a:r>
             <a:endParaRPr lang="en-US" sz="1000" dirty="0"/>
           </a:p>
@@ -10531,7 +10700,7 @@
                 <a:ea typeface="Hanken Grotesk" pitchFamily="34" charset="-122"/>
                 <a:cs typeface="Hanken Grotesk" pitchFamily="34" charset="-120"/>
               </a:rPr>
-              <a:t>C.  They cost the same per pencil</a:t>
+              <a:t>C.  It equals 1/4 as a fraction</a:t>
             </a:r>
             <a:endParaRPr lang="en-US" sz="1000" dirty="0"/>
           </a:p>
@@ -10570,7 +10739,7 @@
                 <a:ea typeface="Hanken Grotesk" pitchFamily="34" charset="-122"/>
                 <a:cs typeface="Hanken Grotesk" pitchFamily="34" charset="-120"/>
               </a:rPr>
-              <a:t>D.  Not enough information</a:t>
+              <a:t>D.  It is greater than 1%</a:t>
             </a:r>
             <a:endParaRPr lang="en-US" sz="1000" dirty="0"/>
           </a:p>
@@ -10865,7 +11034,7 @@
                 <a:ea typeface="Outfit" pitchFamily="34" charset="-122"/>
                 <a:cs typeface="Outfit" pitchFamily="34" charset="-120"/>
               </a:rPr>
-              <a:t>6.AT.2</a:t>
+              <a:t>6.AT.4</a:t>
             </a:r>
             <a:endParaRPr lang="en-US" sz="900" dirty="0"/>
           </a:p>
@@ -11084,7 +11253,7 @@
                 <a:ea typeface="Hanken Grotesk" pitchFamily="34" charset="-122"/>
                 <a:cs typeface="Hanken Grotesk" pitchFamily="34" charset="-120"/>
               </a:rPr>
-              <a:t>Reveal Math Grade 6  ·  Unit 4  ·  Lesson 4-1</a:t>
+              <a:t>Reveal Math Grade 6  ·  Unit 4  ·  Lesson 4-3</a:t>
             </a:r>
             <a:endParaRPr lang="en-US" sz="750" dirty="0"/>
           </a:p>
@@ -11198,7 +11367,7 @@
                 <a:ea typeface="Hanken Grotesk" pitchFamily="34" charset="-122"/>
                 <a:cs typeface="Hanken Grotesk" pitchFamily="34" charset="-120"/>
               </a:rPr>
-              <a:t>I can find a unit rate to compare prices and decide the better buy.</a:t>
+              <a:t>I can write and interpret percents greater than 100% and less than 1%.</a:t>
             </a:r>
             <a:endParaRPr lang="en-US" sz="1100" dirty="0"/>
           </a:p>
@@ -12298,7 +12467,7 @@
                 <a:ea typeface="Outfit" pitchFamily="34" charset="-122"/>
                 <a:cs typeface="Outfit" pitchFamily="34" charset="-120"/>
               </a:rPr>
-              <a:t>6.AT.2</a:t>
+              <a:t>6.AT.4</a:t>
             </a:r>
             <a:endParaRPr lang="en-US" sz="900" dirty="0"/>
           </a:p>
@@ -12517,7 +12686,7 @@
                 <a:ea typeface="Hanken Grotesk" pitchFamily="34" charset="-122"/>
                 <a:cs typeface="Hanken Grotesk" pitchFamily="34" charset="-120"/>
               </a:rPr>
-              <a:t>Reveal Math Grade 6  ·  Unit 4  ·  Lesson 4-1</a:t>
+              <a:t>Reveal Math Grade 6  ·  Unit 4  ·  Lesson 4-3</a:t>
             </a:r>
             <a:endParaRPr lang="en-US" sz="750" dirty="0"/>
           </a:p>
@@ -12767,7 +12936,7 @@
                 <a:ea typeface="Hanken Grotesk" pitchFamily="34" charset="-122"/>
                 <a:cs typeface="Hanken Grotesk" pitchFamily="34" charset="-120"/>
               </a:rPr>
-              <a:t>I can find a unit rate to compare prices and decide the better buy.</a:t>
+              <a:t>I can write and interpret percents greater than 100% and less than 1%.</a:t>
             </a:r>
             <a:endParaRPr lang="en-US" sz="1800" dirty="0"/>
           </a:p>
@@ -12939,7 +13108,7 @@
                 <a:ea typeface="Hanken Grotesk" pitchFamily="34" charset="-122"/>
                 <a:cs typeface="Hanken Grotesk" pitchFamily="34" charset="-120"/>
               </a:rPr>
-              <a:t>I can explain my choice using the words rate, unit rate, per, and better buy.</a:t>
+              <a:t>I can explain my reasoning using the words percent, greater than 100%, less than 1%, and equivalent.</a:t>
             </a:r>
             <a:endParaRPr lang="en-US" sz="1700" dirty="0"/>
           </a:p>
@@ -13112,7 +13281,7 @@
                 <a:ea typeface="Outfit" pitchFamily="34" charset="-122"/>
                 <a:cs typeface="Outfit" pitchFamily="34" charset="-120"/>
               </a:rPr>
-              <a:t>6.AT.2</a:t>
+              <a:t>6.AT.4</a:t>
             </a:r>
             <a:endParaRPr lang="en-US" sz="900" dirty="0"/>
           </a:p>
@@ -13331,7 +13500,7 @@
                 <a:ea typeface="Hanken Grotesk" pitchFamily="34" charset="-122"/>
                 <a:cs typeface="Hanken Grotesk" pitchFamily="34" charset="-120"/>
               </a:rPr>
-              <a:t>Reveal Math Grade 6  ·  Unit 4  ·  Lesson 4-1</a:t>
+              <a:t>Reveal Math Grade 6  ·  Unit 4  ·  Lesson 4-3</a:t>
             </a:r>
             <a:endParaRPr lang="en-US" sz="750" dirty="0"/>
           </a:p>
@@ -13528,7 +13697,7 @@
                 <a:ea typeface="Hanken Grotesk" pitchFamily="34" charset="-122"/>
                 <a:cs typeface="Hanken Grotesk" pitchFamily="34" charset="-120"/>
               </a:rPr>
-              <a:t>Booth A charges $3 for 5 games and Booth B charges $5 for 8 games. Just by looking, which booth seems like the better deal, and what makes it hard to be sure?</a:t>
+              <a:t>The leaderboard shows one player hit 150% of the goal and a bonus round gives a 0.5% boost. How can a percent be more than the whole, and how can one be a tiny sliver?</a:t>
             </a:r>
             <a:endParaRPr lang="en-US" sz="1400" dirty="0"/>
           </a:p>
@@ -13858,7 +14027,7 @@
                 <a:ea typeface="Hanken Grotesk" pitchFamily="34" charset="-122"/>
                 <a:cs typeface="Hanken Grotesk" pitchFamily="34" charset="-120"/>
               </a:rPr>
-              <a:t>rate</a:t>
+              <a:t>percent</a:t>
             </a:r>
             <a:endParaRPr lang="en-US" sz="900" dirty="0"/>
           </a:p>
@@ -13905,7 +14074,7 @@
                 <a:ea typeface="Hanken Grotesk" pitchFamily="34" charset="-122"/>
                 <a:cs typeface="Hanken Grotesk" pitchFamily="34" charset="-120"/>
               </a:rPr>
-              <a:t>per</a:t>
+              <a:t>greater than 100%</a:t>
             </a:r>
             <a:endParaRPr lang="en-US" sz="900" dirty="0"/>
           </a:p>
@@ -13952,7 +14121,7 @@
                 <a:ea typeface="Hanken Grotesk" pitchFamily="34" charset="-122"/>
                 <a:cs typeface="Hanken Grotesk" pitchFamily="34" charset="-120"/>
               </a:rPr>
-              <a:t>ratio</a:t>
+              <a:t>less than 1%</a:t>
             </a:r>
             <a:endParaRPr lang="en-US" sz="900" dirty="0"/>
           </a:p>
@@ -13999,7 +14168,7 @@
                 <a:ea typeface="Hanken Grotesk" pitchFamily="34" charset="-122"/>
                 <a:cs typeface="Hanken Grotesk" pitchFamily="34" charset="-120"/>
               </a:rPr>
-              <a:t>compare</a:t>
+              <a:t>equivalent</a:t>
             </a:r>
             <a:endParaRPr lang="en-US" sz="900" dirty="0"/>
           </a:p>
@@ -14172,7 +14341,7 @@
                 <a:ea typeface="Outfit" pitchFamily="34" charset="-122"/>
                 <a:cs typeface="Outfit" pitchFamily="34" charset="-120"/>
               </a:rPr>
-              <a:t>6.AT.2</a:t>
+              <a:t>6.AT.4</a:t>
             </a:r>
             <a:endParaRPr lang="en-US" sz="900" dirty="0"/>
           </a:p>
@@ -14391,7 +14560,7 @@
                 <a:ea typeface="Hanken Grotesk" pitchFamily="34" charset="-122"/>
                 <a:cs typeface="Hanken Grotesk" pitchFamily="34" charset="-120"/>
               </a:rPr>
-              <a:t>Reveal Math Grade 6  ·  Unit 4  ·  Lesson 4-1</a:t>
+              <a:t>Reveal Math Grade 6  ·  Unit 4  ·  Lesson 4-3</a:t>
             </a:r>
             <a:endParaRPr lang="en-US" sz="750" dirty="0"/>
           </a:p>
@@ -14588,7 +14757,7 @@
                 <a:ea typeface="Hanken Grotesk" pitchFamily="34" charset="-122"/>
                 <a:cs typeface="Hanken Grotesk" pitchFamily="34" charset="-120"/>
               </a:rPr>
-              <a:t>How did you find the cost per game (the unit rate) for each booth, and what did you divide?</a:t>
+              <a:t>When you wrote percents like 150% and 0.5% as decimals, what did you notice about their size compared to 1?</a:t>
             </a:r>
             <a:endParaRPr lang="en-US" sz="1400" dirty="0"/>
           </a:p>
@@ -14918,7 +15087,7 @@
                 <a:ea typeface="Hanken Grotesk" pitchFamily="34" charset="-122"/>
                 <a:cs typeface="Hanken Grotesk" pitchFamily="34" charset="-120"/>
               </a:rPr>
-              <a:t>unit rate</a:t>
+              <a:t>percent</a:t>
             </a:r>
             <a:endParaRPr lang="en-US" sz="900" dirty="0"/>
           </a:p>
@@ -14965,7 +15134,7 @@
                 <a:ea typeface="Hanken Grotesk" pitchFamily="34" charset="-122"/>
                 <a:cs typeface="Hanken Grotesk" pitchFamily="34" charset="-120"/>
               </a:rPr>
-              <a:t>divide</a:t>
+              <a:t>equivalent</a:t>
             </a:r>
             <a:endParaRPr lang="en-US" sz="900" dirty="0"/>
           </a:p>
@@ -15012,7 +15181,7 @@
                 <a:ea typeface="Hanken Grotesk" pitchFamily="34" charset="-122"/>
                 <a:cs typeface="Hanken Grotesk" pitchFamily="34" charset="-120"/>
               </a:rPr>
-              <a:t>per</a:t>
+              <a:t>greater than 100%</a:t>
             </a:r>
             <a:endParaRPr lang="en-US" sz="900" dirty="0"/>
           </a:p>
@@ -15059,7 +15228,7 @@
                 <a:ea typeface="Hanken Grotesk" pitchFamily="34" charset="-122"/>
                 <a:cs typeface="Hanken Grotesk" pitchFamily="34" charset="-120"/>
               </a:rPr>
-              <a:t>rate</a:t>
+              <a:t>less than 1%</a:t>
             </a:r>
             <a:endParaRPr lang="en-US" sz="900" dirty="0"/>
           </a:p>
@@ -15106,7 +15275,7 @@
                 <a:ea typeface="Hanken Grotesk" pitchFamily="34" charset="-122"/>
                 <a:cs typeface="Hanken Grotesk" pitchFamily="34" charset="-120"/>
               </a:rPr>
-              <a:t>cost</a:t>
+              <a:t>mixed number</a:t>
             </a:r>
             <a:endParaRPr lang="en-US" sz="900" dirty="0"/>
           </a:p>
@@ -15279,7 +15448,7 @@
                 <a:ea typeface="Outfit" pitchFamily="34" charset="-122"/>
                 <a:cs typeface="Outfit" pitchFamily="34" charset="-120"/>
               </a:rPr>
-              <a:t>6.AT.2</a:t>
+              <a:t>6.AT.4</a:t>
             </a:r>
             <a:endParaRPr lang="en-US" sz="900" dirty="0"/>
           </a:p>
@@ -15498,7 +15667,7 @@
                 <a:ea typeface="Hanken Grotesk" pitchFamily="34" charset="-122"/>
                 <a:cs typeface="Hanken Grotesk" pitchFamily="34" charset="-120"/>
               </a:rPr>
-              <a:t>Reveal Math Grade 6  ·  Unit 4  ·  Lesson 4-1</a:t>
+              <a:t>Reveal Math Grade 6  ·  Unit 4  ·  Lesson 4-3</a:t>
             </a:r>
             <a:endParaRPr lang="en-US" sz="750" dirty="0"/>
           </a:p>
@@ -15695,7 +15864,7 @@
                 <a:ea typeface="Hanken Grotesk" pitchFamily="34" charset="-122"/>
                 <a:cs typeface="Hanken Grotesk" pitchFamily="34" charset="-120"/>
               </a:rPr>
-              <a:t>The snack bar sells popcorn as 3 cups for $2.25 or 8 cups for $5.60. How do unit rates help you decide the better buy?</a:t>
+              <a:t>A jackpot pays 250% of your tokens and you inserted 40 tokens. One friend says 100 tokens, another says 60. Who is right, and why does '250%' mean more than your tokens?</a:t>
             </a:r>
             <a:endParaRPr lang="en-US" sz="1400" dirty="0"/>
           </a:p>
@@ -16025,7 +16194,7 @@
                 <a:ea typeface="Hanken Grotesk" pitchFamily="34" charset="-122"/>
                 <a:cs typeface="Hanken Grotesk" pitchFamily="34" charset="-120"/>
               </a:rPr>
-              <a:t>unit rate</a:t>
+              <a:t>percent</a:t>
             </a:r>
             <a:endParaRPr lang="en-US" sz="900" dirty="0"/>
           </a:p>
@@ -16072,7 +16241,7 @@
                 <a:ea typeface="Hanken Grotesk" pitchFamily="34" charset="-122"/>
                 <a:cs typeface="Hanken Grotesk" pitchFamily="34" charset="-120"/>
               </a:rPr>
-              <a:t>better buy</a:t>
+              <a:t>greater than 100%</a:t>
             </a:r>
             <a:endParaRPr lang="en-US" sz="900" dirty="0"/>
           </a:p>
@@ -16119,7 +16288,7 @@
                 <a:ea typeface="Hanken Grotesk" pitchFamily="34" charset="-122"/>
                 <a:cs typeface="Hanken Grotesk" pitchFamily="34" charset="-120"/>
               </a:rPr>
-              <a:t>divide</a:t>
+              <a:t>equivalent</a:t>
             </a:r>
             <a:endParaRPr lang="en-US" sz="900" dirty="0"/>
           </a:p>
@@ -16166,54 +16335,7 @@
                 <a:ea typeface="Hanken Grotesk" pitchFamily="34" charset="-122"/>
                 <a:cs typeface="Hanken Grotesk" pitchFamily="34" charset="-120"/>
               </a:rPr>
-              <a:t>per</a:t>
-            </a:r>
-            <a:endParaRPr lang="en-US" sz="900" dirty="0"/>
-          </a:p>
-        </p:txBody>
-      </p:sp>
-      <p:sp>
-        <p:nvSpPr>
-          <p:cNvPr id="32" name="Text 30"/>
-          <p:cNvSpPr/>
-          <p:nvPr/>
-        </p:nvSpPr>
-        <p:spPr>
-          <a:xfrm>
-            <a:off x="6263640" y="3666744"/>
-            <a:ext cx="1120140" cy="329184"/>
-          </a:xfrm>
-          <a:prstGeom prst="roundRect">
-            <a:avLst>
-              <a:gd name="adj" fmla="val 13889"/>
-            </a:avLst>
-          </a:prstGeom>
-          <a:solidFill>
-            <a:srgbClr val="FFFFFF"/>
-          </a:solidFill>
-          <a:ln w="12700">
-            <a:solidFill>
-              <a:srgbClr val="D6DBDF"/>
-            </a:solidFill>
-          </a:ln>
-        </p:spPr>
-        <p:txBody>
-          <a:bodyPr wrap="square" rtlCol="0" anchor="ctr"/>
-          <a:lstStyle/>
-          <a:p>
-            <a:pPr algn="ctr" indent="0" marL="0">
-              <a:buNone/>
-            </a:pPr>
-            <a:r>
-              <a:rPr lang="en-US" sz="900" b="1" dirty="0">
-                <a:solidFill>
-                  <a:srgbClr val="17324D"/>
-                </a:solidFill>
-                <a:latin typeface="Hanken Grotesk" pitchFamily="34" charset="0"/>
-                <a:ea typeface="Hanken Grotesk" pitchFamily="34" charset="-122"/>
-                <a:cs typeface="Hanken Grotesk" pitchFamily="34" charset="-120"/>
-              </a:rPr>
-              <a:t>cost</a:t>
+              <a:t>mixed number</a:t>
             </a:r>
             <a:endParaRPr lang="en-US" sz="900" dirty="0"/>
           </a:p>
@@ -16386,7 +16508,7 @@
                 <a:ea typeface="Outfit" pitchFamily="34" charset="-122"/>
                 <a:cs typeface="Outfit" pitchFamily="34" charset="-120"/>
               </a:rPr>
-              <a:t>6.AT.2</a:t>
+              <a:t>6.AT.4</a:t>
             </a:r>
             <a:endParaRPr lang="en-US" sz="900" dirty="0"/>
           </a:p>
@@ -16605,7 +16727,7 @@
                 <a:ea typeface="Hanken Grotesk" pitchFamily="34" charset="-122"/>
                 <a:cs typeface="Hanken Grotesk" pitchFamily="34" charset="-120"/>
               </a:rPr>
-              <a:t>Reveal Math Grade 6  ·  Unit 4  ·  Lesson 4-1</a:t>
+              <a:t>Reveal Math Grade 6  ·  Unit 4  ·  Lesson 4-3</a:t>
             </a:r>
             <a:endParaRPr lang="en-US" sz="750" dirty="0"/>
           </a:p>
@@ -16802,7 +16924,7 @@
                 <a:ea typeface="Hanken Grotesk" pitchFamily="34" charset="-122"/>
                 <a:cs typeface="Hanken Grotesk" pitchFamily="34" charset="-120"/>
               </a:rPr>
-              <a:t>During practice on Rates and Unit Rates, what strategy did you use when a problem felt tricky?</a:t>
+              <a:t>During practice on Percents Greater Than 100% and Less Than 1%, what strategy did you use when a problem felt tricky?</a:t>
             </a:r>
             <a:endParaRPr lang="en-US" sz="1400" dirty="0"/>
           </a:p>
@@ -17132,7 +17254,7 @@
                 <a:ea typeface="Hanken Grotesk" pitchFamily="34" charset="-122"/>
                 <a:cs typeface="Hanken Grotesk" pitchFamily="34" charset="-120"/>
               </a:rPr>
-              <a:t>Rate</a:t>
+              <a:t>Percent</a:t>
             </a:r>
             <a:endParaRPr lang="en-US" sz="900" dirty="0"/>
           </a:p>
@@ -17179,7 +17301,7 @@
                 <a:ea typeface="Hanken Grotesk" pitchFamily="34" charset="-122"/>
                 <a:cs typeface="Hanken Grotesk" pitchFamily="34" charset="-120"/>
               </a:rPr>
-              <a:t>Unit Rate</a:t>
+              <a:t>Greater than 100%</a:t>
             </a:r>
             <a:endParaRPr lang="en-US" sz="900" dirty="0"/>
           </a:p>
@@ -17226,7 +17348,7 @@
                 <a:ea typeface="Hanken Grotesk" pitchFamily="34" charset="-122"/>
                 <a:cs typeface="Hanken Grotesk" pitchFamily="34" charset="-120"/>
               </a:rPr>
-              <a:t>Per</a:t>
+              <a:t>Less than 1%</a:t>
             </a:r>
             <a:endParaRPr lang="en-US" sz="900" dirty="0"/>
           </a:p>
@@ -17273,7 +17395,7 @@
                 <a:ea typeface="Hanken Grotesk" pitchFamily="34" charset="-122"/>
                 <a:cs typeface="Hanken Grotesk" pitchFamily="34" charset="-120"/>
               </a:rPr>
-              <a:t>Ratio</a:t>
+              <a:t>Equivalent</a:t>
             </a:r>
             <a:endParaRPr lang="en-US" sz="900" dirty="0"/>
           </a:p>
@@ -17446,7 +17568,7 @@
                 <a:ea typeface="Outfit" pitchFamily="34" charset="-122"/>
                 <a:cs typeface="Outfit" pitchFamily="34" charset="-120"/>
               </a:rPr>
-              <a:t>6.AT.2</a:t>
+              <a:t>6.AT.4</a:t>
             </a:r>
             <a:endParaRPr lang="en-US" sz="900" dirty="0"/>
           </a:p>
@@ -17665,7 +17787,7 @@
                 <a:ea typeface="Hanken Grotesk" pitchFamily="34" charset="-122"/>
                 <a:cs typeface="Hanken Grotesk" pitchFamily="34" charset="-120"/>
               </a:rPr>
-              <a:t>Reveal Math Grade 6  ·  Unit 4  ·  Lesson 4-1</a:t>
+              <a:t>Reveal Math Grade 6  ·  Unit 4  ·  Lesson 4-3</a:t>
             </a:r>
             <a:endParaRPr lang="en-US" sz="750" dirty="0"/>
           </a:p>
@@ -17859,7 +17981,7 @@
                 <a:ea typeface="Hanken Grotesk" pitchFamily="34" charset="-122"/>
                 <a:cs typeface="Hanken Grotesk" pitchFamily="34" charset="-120"/>
               </a:rPr>
-              <a:t>You're comparing ticket prices at different game booths in the arcade. Booth A charges $3 for 5 games, and Booth B charges $5 for 8 games. Which booth gives you a better deal? To find out, you need to figure out the cost per game — that's the unit rate!</a:t>
+              <a:t>The arcade just posted its monthly leaderboard! Some players crushed the target score — one player hit 150% of the goal! Meanwhile, a rare bonus round gives only a 0.5% point boost. You need to understand what these unusual percents really mean to read the leaderboard correctly.</a:t>
             </a:r>
             <a:endParaRPr lang="en-US" sz="1150" dirty="0"/>
           </a:p>
@@ -18084,7 +18206,7 @@
                 <a:ea typeface="Hanken Grotesk" pitchFamily="34" charset="-122"/>
                 <a:cs typeface="Hanken Grotesk" pitchFamily="34" charset="-120"/>
               </a:rPr>
-              <a:t>•  What two quantities are being compared at each booth?</a:t>
+              <a:t>•  What does it mean when a score is shown as 150% of the target?</a:t>
             </a:r>
             <a:endParaRPr lang="en-US" sz="1000" dirty="0"/>
           </a:p>
@@ -18104,7 +18226,7 @@
                 <a:ea typeface="Hanken Grotesk" pitchFamily="34" charset="-122"/>
                 <a:cs typeface="Hanken Grotesk" pitchFamily="34" charset="-120"/>
               </a:rPr>
-              <a:t>•  Which booth seems like a better deal at first glance?</a:t>
+              <a:t>•  Can a percent be less than 1%? What would that look like?</a:t>
             </a:r>
             <a:endParaRPr lang="en-US" sz="1000" dirty="0"/>
           </a:p>
@@ -18221,7 +18343,7 @@
                 <a:ea typeface="Hanken Grotesk" pitchFamily="34" charset="-122"/>
                 <a:cs typeface="Hanken Grotesk" pitchFamily="34" charset="-120"/>
               </a:rPr>
-              <a:t>•  How can you compare prices when the number of games is different?</a:t>
+              <a:t>•  How do you write a percent greater than 100% as a decimal or fraction?</a:t>
             </a:r>
             <a:endParaRPr lang="en-US" sz="1000" dirty="0"/>
           </a:p>
@@ -18241,7 +18363,7 @@
                 <a:ea typeface="Hanken Grotesk" pitchFamily="34" charset="-122"/>
                 <a:cs typeface="Hanken Grotesk" pitchFamily="34" charset="-120"/>
               </a:rPr>
-              <a:t>•  What does it mean to find the cost for just one game?</a:t>
+              <a:t>•  When would you see a percent less than 1% in real life?</a:t>
             </a:r>
             <a:endParaRPr lang="en-US" sz="1000" dirty="0"/>
           </a:p>
@@ -18414,7 +18536,7 @@
                 <a:ea typeface="Outfit" pitchFamily="34" charset="-122"/>
                 <a:cs typeface="Outfit" pitchFamily="34" charset="-120"/>
               </a:rPr>
-              <a:t>6.AT.2</a:t>
+              <a:t>6.AT.4</a:t>
             </a:r>
             <a:endParaRPr lang="en-US" sz="900" dirty="0"/>
           </a:p>
@@ -18633,7 +18755,7 @@
                 <a:ea typeface="Hanken Grotesk" pitchFamily="34" charset="-122"/>
                 <a:cs typeface="Hanken Grotesk" pitchFamily="34" charset="-120"/>
               </a:rPr>
-              <a:t>Reveal Math Grade 6  ·  Unit 4  ·  Lesson 4-1</a:t>
+              <a:t>Reveal Math Grade 6  ·  Unit 4  ·  Lesson 4-3</a:t>
             </a:r>
             <a:endParaRPr lang="en-US" sz="750" dirty="0"/>
           </a:p>
@@ -18929,7 +19051,7 @@
                           <a:ea typeface="Hanken Grotesk" pitchFamily="34" charset="-122"/>
                           <a:cs typeface="Hanken Grotesk" pitchFamily="34" charset="-120"/>
                         </a:rPr>
-                        <a:t>Rate</a:t>
+                        <a:t>Percent</a:t>
                       </a:r>
                       <a:pPr indent="0" marL="0">
                         <a:buNone/>
@@ -18953,7 +19075,7 @@
                           <a:ea typeface="Hanken Grotesk" pitchFamily="34" charset="-122"/>
                           <a:cs typeface="Hanken Grotesk" pitchFamily="34" charset="-120"/>
                         </a:rPr>
-                        <a:t>Tasa</a:t>
+                        <a:t>Porcentaje</a:t>
                       </a:r>
                       <a:endParaRPr lang="en-US" sz="950" dirty="0">
                         <a:latin typeface="Hanken Grotesk" charset="0"/>
@@ -19021,7 +19143,7 @@
                           <a:ea typeface="Hanken Grotesk" pitchFamily="34" charset="-122"/>
                           <a:cs typeface="Hanken Grotesk" pitchFamily="34" charset="-120"/>
                         </a:rPr>
-                        <a:t>A ratio comparing two amounts with different units, like miles per hour.</a:t>
+                        <a:t>A way to compare a number to 100, shown with the % sign.</a:t>
                       </a:r>
                       <a:pPr indent="0" marL="0">
                         <a:buNone/>
@@ -19045,7 +19167,7 @@
                           <a:ea typeface="Hanken Grotesk" pitchFamily="34" charset="-122"/>
                           <a:cs typeface="Hanken Grotesk" pitchFamily="34" charset="-120"/>
                         </a:rPr>
-                        <a:t>Una razón que compara dos cantidades con unidades distintas, como millas por hora.</a:t>
+                        <a:t>Una manera de comparar un número con 100, con el signo %.</a:t>
                       </a:r>
                       <a:endParaRPr lang="en-US" sz="900" dirty="0">
                         <a:latin typeface="Hanken Grotesk" charset="0"/>
@@ -19113,7 +19235,7 @@
                           <a:ea typeface="Hanken Grotesk" pitchFamily="34" charset="-122"/>
                           <a:cs typeface="Hanken Grotesk" pitchFamily="34" charset="-120"/>
                         </a:rPr>
-                        <a:t>$12 for 4 games is a rate</a:t>
+                        <a:t>45% means 45 out of 100</a:t>
                       </a:r>
                       <a:endParaRPr lang="en-US" sz="900" dirty="0">
                         <a:latin typeface="Hanken Grotesk" charset="0"/>
@@ -19183,7 +19305,7 @@
                           <a:ea typeface="Hanken Grotesk" pitchFamily="34" charset="-122"/>
                           <a:cs typeface="Hanken Grotesk" pitchFamily="34" charset="-120"/>
                         </a:rPr>
-                        <a:t>Unit Rate</a:t>
+                        <a:t>Greater than 100%</a:t>
                       </a:r>
                       <a:pPr indent="0" marL="0">
                         <a:buNone/>
@@ -19207,7 +19329,7 @@
                           <a:ea typeface="Hanken Grotesk" pitchFamily="34" charset="-122"/>
                           <a:cs typeface="Hanken Grotesk" pitchFamily="34" charset="-120"/>
                         </a:rPr>
-                        <a:t>Tasa unitaria</a:t>
+                        <a:t>Mayor que 100%</a:t>
                       </a:r>
                       <a:endParaRPr lang="en-US" sz="950" dirty="0">
                         <a:latin typeface="Hanken Grotesk" charset="0"/>
@@ -19275,7 +19397,7 @@
                           <a:ea typeface="Hanken Grotesk" pitchFamily="34" charset="-122"/>
                           <a:cs typeface="Hanken Grotesk" pitchFamily="34" charset="-120"/>
                         </a:rPr>
-                        <a:t>A rate for just 1 of something, like cost for 1 item.</a:t>
+                        <a:t>A percent bigger than 100%, more than the whole thing.</a:t>
                       </a:r>
                       <a:pPr indent="0" marL="0">
                         <a:buNone/>
@@ -19299,7 +19421,7 @@
                           <a:ea typeface="Hanken Grotesk" pitchFamily="34" charset="-122"/>
                           <a:cs typeface="Hanken Grotesk" pitchFamily="34" charset="-120"/>
                         </a:rPr>
-                        <a:t>Una tasa para solo 1 de algo, como el precio de 1 artículo.</a:t>
+                        <a:t>Un porcentaje mayor que 100%, más que todo el entero.</a:t>
                       </a:r>
                       <a:endParaRPr lang="en-US" sz="900" dirty="0">
                         <a:latin typeface="Hanken Grotesk" charset="0"/>
@@ -19367,7 +19489,7 @@
                           <a:ea typeface="Hanken Grotesk" pitchFamily="34" charset="-122"/>
                           <a:cs typeface="Hanken Grotesk" pitchFamily="34" charset="-120"/>
                         </a:rPr>
-                        <a:t>$3 per 1 game</a:t>
+                        <a:t>150% means 1.5 times the whole</a:t>
                       </a:r>
                       <a:endParaRPr lang="en-US" sz="900" dirty="0">
                         <a:latin typeface="Hanken Grotesk" charset="0"/>
@@ -19437,7 +19559,7 @@
                           <a:ea typeface="Hanken Grotesk" pitchFamily="34" charset="-122"/>
                           <a:cs typeface="Hanken Grotesk" pitchFamily="34" charset="-120"/>
                         </a:rPr>
-                        <a:t>Per</a:t>
+                        <a:t>Less than 1%</a:t>
                       </a:r>
                       <a:pPr indent="0" marL="0">
                         <a:buNone/>
@@ -19461,7 +19583,7 @@
                           <a:ea typeface="Hanken Grotesk" pitchFamily="34" charset="-122"/>
                           <a:cs typeface="Hanken Grotesk" pitchFamily="34" charset="-120"/>
                         </a:rPr>
-                        <a:t>Por</a:t>
+                        <a:t>Menor que 1%</a:t>
                       </a:r>
                       <a:endParaRPr lang="en-US" sz="950" dirty="0">
                         <a:latin typeface="Hanken Grotesk" charset="0"/>
@@ -19529,7 +19651,7 @@
                           <a:ea typeface="Hanken Grotesk" pitchFamily="34" charset="-122"/>
                           <a:cs typeface="Hanken Grotesk" pitchFamily="34" charset="-120"/>
                         </a:rPr>
-                        <a:t>For each one. Example: 5 dollars per book.</a:t>
+                        <a:t>A percent smaller than 1%, a very tiny part.</a:t>
                       </a:r>
                       <a:pPr indent="0" marL="0">
                         <a:buNone/>
@@ -19553,7 +19675,7 @@
                           <a:ea typeface="Hanken Grotesk" pitchFamily="34" charset="-122"/>
                           <a:cs typeface="Hanken Grotesk" pitchFamily="34" charset="-120"/>
                         </a:rPr>
-                        <a:t>Por cada uno. Ejemplo: 5 dólares por libro.</a:t>
+                        <a:t>Un porcentaje menor que 1%, una parte muy pequeña.</a:t>
                       </a:r>
                       <a:endParaRPr lang="en-US" sz="900" dirty="0">
                         <a:latin typeface="Hanken Grotesk" charset="0"/>
@@ -19621,7 +19743,7 @@
                           <a:ea typeface="Hanken Grotesk" pitchFamily="34" charset="-122"/>
                           <a:cs typeface="Hanken Grotesk" pitchFamily="34" charset="-120"/>
                         </a:rPr>
-                        <a:t>60 miles per hour means 60 miles for every 1 hour</a:t>
+                        <a:t>0.5% of 1,000 = only 5 items — a tiny sliver</a:t>
                       </a:r>
                       <a:endParaRPr lang="en-US" sz="900" dirty="0">
                         <a:latin typeface="Hanken Grotesk" charset="0"/>
@@ -19691,7 +19813,7 @@
                           <a:ea typeface="Hanken Grotesk" pitchFamily="34" charset="-122"/>
                           <a:cs typeface="Hanken Grotesk" pitchFamily="34" charset="-120"/>
                         </a:rPr>
-                        <a:t>Ratio</a:t>
+                        <a:t>Equivalent</a:t>
                       </a:r>
                       <a:pPr indent="0" marL="0">
                         <a:buNone/>
@@ -19715,7 +19837,7 @@
                           <a:ea typeface="Hanken Grotesk" pitchFamily="34" charset="-122"/>
                           <a:cs typeface="Hanken Grotesk" pitchFamily="34" charset="-120"/>
                         </a:rPr>
-                        <a:t>Razón</a:t>
+                        <a:t>Equivalente</a:t>
                       </a:r>
                       <a:endParaRPr lang="en-US" sz="950" dirty="0">
                         <a:latin typeface="Hanken Grotesk" charset="0"/>
@@ -19783,7 +19905,7 @@
                           <a:ea typeface="Hanken Grotesk" pitchFamily="34" charset="-122"/>
                           <a:cs typeface="Hanken Grotesk" pitchFamily="34" charset="-120"/>
                         </a:rPr>
-                        <a:t>A way to compare two amounts.</a:t>
+                        <a:t>Having the same value, just written a different way.</a:t>
                       </a:r>
                       <a:pPr indent="0" marL="0">
                         <a:buNone/>
@@ -19807,7 +19929,7 @@
                           <a:ea typeface="Hanken Grotesk" pitchFamily="34" charset="-122"/>
                           <a:cs typeface="Hanken Grotesk" pitchFamily="34" charset="-120"/>
                         </a:rPr>
-                        <a:t>Una manera de comparar dos cantidades.</a:t>
+                        <a:t>Tener el mismo valor, escrito de otra forma.</a:t>
                       </a:r>
                       <a:endParaRPr lang="en-US" sz="900" dirty="0">
                         <a:latin typeface="Hanken Grotesk" charset="0"/>
@@ -19875,7 +19997,7 @@
                           <a:ea typeface="Hanken Grotesk" pitchFamily="34" charset="-122"/>
                           <a:cs typeface="Hanken Grotesk" pitchFamily="34" charset="-120"/>
                         </a:rPr>
-                        <a:t>5 to 3 or 5:3</a:t>
+                        <a:t>150% = 1.5 = 3/2</a:t>
                       </a:r>
                       <a:endParaRPr lang="en-US" sz="900" dirty="0">
                         <a:latin typeface="Hanken Grotesk" charset="0"/>
@@ -19945,7 +20067,7 @@
                           <a:ea typeface="Hanken Grotesk" pitchFamily="34" charset="-122"/>
                           <a:cs typeface="Hanken Grotesk" pitchFamily="34" charset="-120"/>
                         </a:rPr>
-                        <a:t>Better Buy</a:t>
+                        <a:t>Mixed number</a:t>
                       </a:r>
                       <a:pPr indent="0" marL="0">
                         <a:buNone/>
@@ -19969,7 +20091,7 @@
                           <a:ea typeface="Hanken Grotesk" pitchFamily="34" charset="-122"/>
                           <a:cs typeface="Hanken Grotesk" pitchFamily="34" charset="-120"/>
                         </a:rPr>
-                        <a:t>Mejor compra</a:t>
+                        <a:t>Número mixto</a:t>
                       </a:r>
                       <a:endParaRPr lang="en-US" sz="950" dirty="0">
                         <a:latin typeface="Hanken Grotesk" charset="0"/>
@@ -20037,7 +20159,7 @@
                           <a:ea typeface="Hanken Grotesk" pitchFamily="34" charset="-122"/>
                           <a:cs typeface="Hanken Grotesk" pitchFamily="34" charset="-120"/>
                         </a:rPr>
-                        <a:t>The choice that costs less for each item.</a:t>
+                        <a:t>A whole number plus a fraction, like 1 1/2.</a:t>
                       </a:r>
                       <a:pPr indent="0" marL="0">
                         <a:buNone/>
@@ -20061,7 +20183,7 @@
                           <a:ea typeface="Hanken Grotesk" pitchFamily="34" charset="-122"/>
                           <a:cs typeface="Hanken Grotesk" pitchFamily="34" charset="-120"/>
                         </a:rPr>
-                        <a:t>La opción que cuesta menos por cada artículo.</a:t>
+                        <a:t>Un número entero más una fracción, como 1 1/2.</a:t>
                       </a:r>
                       <a:endParaRPr lang="en-US" sz="900" dirty="0">
                         <a:latin typeface="Hanken Grotesk" charset="0"/>
@@ -20129,7 +20251,7 @@
                           <a:ea typeface="Hanken Grotesk" pitchFamily="34" charset="-122"/>
                           <a:cs typeface="Hanken Grotesk" pitchFamily="34" charset="-120"/>
                         </a:rPr>
-                        <a:t>Pack A: $0.50 per pencil vs Pack B: $0.40 per pencil — Pack B is the better buy</a:t>
+                        <a:t>150% = 1 and 1/2 = 1.5</a:t>
                       </a:r>
                       <a:endParaRPr lang="en-US" sz="900" dirty="0">
                         <a:latin typeface="Hanken Grotesk" charset="0"/>
@@ -20218,7 +20340,7 @@
                 <a:ea typeface="Outfit" pitchFamily="34" charset="-122"/>
                 <a:cs typeface="Outfit" pitchFamily="34" charset="-120"/>
               </a:rPr>
-              <a:t>Unit Rate — example vs. non-example:</a:t>
+              <a:t>Greater than 100% — example vs. non-example:</a:t>
             </a:r>
             <a:endParaRPr lang="en-US" sz="950" dirty="0"/>
           </a:p>
@@ -20305,7 +20427,7 @@
                 <a:ea typeface="Hanken Grotesk" pitchFamily="34" charset="-122"/>
                 <a:cs typeface="Hanken Grotesk" pitchFamily="34" charset="-120"/>
               </a:rPr>
-              <a:t>$2 per 1 pound  </a:t>
+              <a:t>150%  </a:t>
             </a:r>
             <a:pPr indent="0" marL="0">
               <a:buNone/>
@@ -20319,7 +20441,7 @@
                 <a:ea typeface="Hanken Grotesk" pitchFamily="34" charset="-122"/>
                 <a:cs typeface="Hanken Grotesk" pitchFamily="34" charset="-120"/>
               </a:rPr>
-              <a:t>It gives the amount for exactly one unit.</a:t>
+              <a:t>150% is more than one whole (100%).</a:t>
             </a:r>
             <a:endParaRPr lang="en-US" sz="900" dirty="0"/>
           </a:p>
@@ -20406,7 +20528,7 @@
                 <a:ea typeface="Hanken Grotesk" pitchFamily="34" charset="-122"/>
                 <a:cs typeface="Hanken Grotesk" pitchFamily="34" charset="-120"/>
               </a:rPr>
-              <a:t>$6 for 3 pounds  </a:t>
+              <a:t>75%  </a:t>
             </a:r>
             <a:pPr indent="0" marL="0">
               <a:buNone/>
@@ -20420,7 +20542,7 @@
                 <a:ea typeface="Hanken Grotesk" pitchFamily="34" charset="-122"/>
                 <a:cs typeface="Hanken Grotesk" pitchFamily="34" charset="-120"/>
               </a:rPr>
-              <a:t>That is a rate for 3 units, not a unit rate.</a:t>
+              <a:t>75% is less than one whole.</a:t>
             </a:r>
             <a:endParaRPr lang="en-US" sz="900" dirty="0"/>
           </a:p>
@@ -20593,7 +20715,7 @@
                 <a:ea typeface="Outfit" pitchFamily="34" charset="-122"/>
                 <a:cs typeface="Outfit" pitchFamily="34" charset="-120"/>
               </a:rPr>
-              <a:t>6.AT.2</a:t>
+              <a:t>6.AT.4</a:t>
             </a:r>
             <a:endParaRPr lang="en-US" sz="900" dirty="0"/>
           </a:p>
@@ -20812,7 +20934,7 @@
                 <a:ea typeface="Hanken Grotesk" pitchFamily="34" charset="-122"/>
                 <a:cs typeface="Hanken Grotesk" pitchFamily="34" charset="-120"/>
               </a:rPr>
-              <a:t>Reveal Math Grade 6  ·  Unit 4  ·  Lesson 4-1</a:t>
+              <a:t>Reveal Math Grade 6  ·  Unit 4  ·  Lesson 4-3</a:t>
             </a:r>
             <a:endParaRPr lang="en-US" sz="750" dirty="0"/>
           </a:p>
@@ -20967,7 +21089,7 @@
                 <a:ea typeface="Outfit" pitchFamily="34" charset="-122"/>
                 <a:cs typeface="Outfit" pitchFamily="34" charset="-120"/>
               </a:rPr>
-              <a:t>What is a unit rate, and how does it help me find the better buy?</a:t>
+              <a:t>How can a percent be more than the whole, or smaller than a tiny piece?</a:t>
             </a:r>
             <a:endParaRPr lang="en-US" sz="1200" dirty="0"/>
           </a:p>
@@ -21065,7 +21187,7 @@
                 <a:ea typeface="Hanken Grotesk" pitchFamily="34" charset="-122"/>
                 <a:cs typeface="Hanken Grotesk" pitchFamily="34" charset="-120"/>
               </a:rPr>
-              <a:t>A booth charges $4 for 8 games. What do we divide?</a:t>
+              <a:t>Let's write 200% as a decimal. What is 200 ÷ 100? (2.0)</a:t>
             </a:r>
             <a:endParaRPr lang="en-US" sz="1050" dirty="0"/>
           </a:p>
@@ -21163,7 +21285,7 @@
                 <a:ea typeface="Hanken Grotesk" pitchFamily="34" charset="-122"/>
                 <a:cs typeface="Hanken Grotesk" pitchFamily="34" charset="-120"/>
               </a:rPr>
-              <a:t>We divide cost by games: $4 ÷ 8 = ?</a:t>
+              <a:t>Is 2.0 more or less than one whole? (More — it is twice the whole.)</a:t>
             </a:r>
             <a:endParaRPr lang="en-US" sz="1050" dirty="0"/>
           </a:p>
@@ -21261,7 +21383,7 @@
                 <a:ea typeface="Hanken Grotesk" pitchFamily="34" charset="-122"/>
                 <a:cs typeface="Hanken Grotesk" pitchFamily="34" charset="-120"/>
               </a:rPr>
-              <a:t>What is the cost for just 1 game? ($0.50 per game.)</a:t>
+              <a:t>Now try 0.25%: what is 0.25 ÷ 100? (0.0025)</a:t>
             </a:r>
             <a:endParaRPr lang="en-US" sz="1050" dirty="0"/>
           </a:p>
@@ -21437,7 +21559,7 @@
                 <a:ea typeface="Hanken Grotesk" pitchFamily="34" charset="-122"/>
                 <a:cs typeface="Hanken Grotesk" pitchFamily="34" charset="-120"/>
               </a:rPr>
-              <a:t>Booth A charges $3 for 5 games and Booth B charges $5 for 8 games. Just by looking, which booth seems like the better deal, and what makes it hard to be sure?</a:t>
+              <a:t>The leaderboard shows one player hit 150% of the goal and a bonus round gives a 0.5% boost. How can a percent be more than the whole, and how can one be a tiny sliver?</a:t>
             </a:r>
             <a:endParaRPr lang="en-US" sz="1000" dirty="0"/>
           </a:p>
@@ -21549,7 +21671,7 @@
                 <a:ea typeface="Hanken Grotesk" pitchFamily="34" charset="-122"/>
                 <a:cs typeface="Hanken Grotesk" pitchFamily="34" charset="-120"/>
               </a:rPr>
-              <a:t>To find a unit rate, divide the total cost by the number of items. The lower cost per item is the better buy.</a:t>
+              <a:t>To change any percent to a decimal, divide by 100 (move the decimal point two places to the left).</a:t>
             </a:r>
             <a:endParaRPr lang="en-US" sz="950" dirty="0"/>
           </a:p>
